--- a/public/fun/pack/pptx/wedding/결혼식_10_감사·답례중심_어버이날꽃.pptx
+++ b/public/fun/pack/pptx/wedding/결혼식_10_감사·답례중심_어버이날꽃.pptx
@@ -3347,7 +3347,7 @@
             <a:r>
               <a:rPr sz="3600" b="1" i="0">
                 <a:solidFill>
-                  <a:srgbClr val="7A1F2E"/>
+                  <a:srgbClr val="721D2B"/>
                 </a:solidFill>
               </a:rPr>
               <a:t>저희 결혼합니다</a:t>
@@ -3385,7 +3385,7 @@
             <a:r>
               <a:rPr sz="1700" b="0" i="1">
                 <a:solidFill>
-                  <a:srgbClr val="7A1F2E"/>
+                  <a:srgbClr val="721D2B"/>
                 </a:solidFill>
               </a:rPr>
               <a:t>바쁘신 중에 와 주신 것 잊지 않겠습니다</a:t>
@@ -3460,7 +3460,7 @@
     <p:bg>
       <p:bgPr>
         <a:solidFill>
-          <a:srgbClr val="FBEFF1"/>
+          <a:srgbClr val="FCF3F4"/>
         </a:solidFill>
         <a:effectLst/>
       </p:bgPr>
@@ -3489,7 +3489,7 @@
           <a:noFill/>
           <a:ln w="28575">
             <a:solidFill>
-              <a:srgbClr val="CC334D"/>
+              <a:srgbClr val="DF3A55"/>
             </a:solidFill>
           </a:ln>
         </p:spPr>
@@ -3518,7 +3518,7 @@
           <a:noFill/>
           <a:ln w="9525">
             <a:solidFill>
-              <a:srgbClr val="F4CDD3"/>
+              <a:srgbClr val="F7D4DA"/>
             </a:solidFill>
           </a:ln>
         </p:spPr>
@@ -3560,7 +3560,7 @@
             <a:r>
               <a:rPr sz="3000" b="1" i="0">
                 <a:solidFill>
-                  <a:srgbClr val="7A1F2E"/>
+                  <a:srgbClr val="721D2B"/>
                 </a:solidFill>
               </a:rPr>
               <a:t>신랑 · 신부 소개</a:t>
@@ -3583,11 +3583,11 @@
             <a:avLst/>
           </a:prstGeom>
           <a:solidFill>
-            <a:srgbClr val="F4CDD3"/>
+            <a:srgbClr val="F7D4DA"/>
           </a:solidFill>
           <a:ln w="19050">
             <a:solidFill>
-              <a:srgbClr val="CC334D"/>
+              <a:srgbClr val="DF3A55"/>
             </a:solidFill>
             <a:prstDash val="dash"/>
           </a:ln>
@@ -3606,7 +3606,7 @@
             <a:r>
               <a:rPr sz="1200" b="0" i="0">
                 <a:solidFill>
-                  <a:srgbClr val="7A1F2E"/>
+                  <a:srgbClr val="721D2B"/>
                 </a:solidFill>
               </a:rPr>
               <a:t>사진</a:t>
@@ -3644,7 +3644,7 @@
             <a:r>
               <a:rPr sz="1600" b="1" i="0">
                 <a:solidFill>
-                  <a:srgbClr val="7A1F2E"/>
+                  <a:srgbClr val="721D2B"/>
                 </a:solidFill>
               </a:rPr>
               <a:t>신랑</a:t>
@@ -3735,11 +3735,11 @@
             <a:avLst/>
           </a:prstGeom>
           <a:solidFill>
-            <a:srgbClr val="F4CDD3"/>
+            <a:srgbClr val="F7D4DA"/>
           </a:solidFill>
           <a:ln w="19050">
             <a:solidFill>
-              <a:srgbClr val="CC334D"/>
+              <a:srgbClr val="DF3A55"/>
             </a:solidFill>
             <a:prstDash val="dash"/>
           </a:ln>
@@ -3758,7 +3758,7 @@
             <a:r>
               <a:rPr sz="1200" b="0" i="0">
                 <a:solidFill>
-                  <a:srgbClr val="7A1F2E"/>
+                  <a:srgbClr val="721D2B"/>
                 </a:solidFill>
               </a:rPr>
               <a:t>사진</a:t>
@@ -3796,7 +3796,7 @@
             <a:r>
               <a:rPr sz="1600" b="1" i="0">
                 <a:solidFill>
-                  <a:srgbClr val="7A1F2E"/>
+                  <a:srgbClr val="721D2B"/>
                 </a:solidFill>
               </a:rPr>
               <a:t>신부</a:t>
@@ -3886,7 +3886,7 @@
     <p:bg>
       <p:bgPr>
         <a:solidFill>
-          <a:srgbClr val="FBEFF1"/>
+          <a:srgbClr val="FCF3F4"/>
         </a:solidFill>
         <a:effectLst/>
       </p:bgPr>
@@ -3915,7 +3915,7 @@
           <a:noFill/>
           <a:ln w="28575">
             <a:solidFill>
-              <a:srgbClr val="CC334D"/>
+              <a:srgbClr val="DF3A55"/>
             </a:solidFill>
           </a:ln>
         </p:spPr>
@@ -3944,7 +3944,7 @@
           <a:noFill/>
           <a:ln w="9525">
             <a:solidFill>
-              <a:srgbClr val="F4CDD3"/>
+              <a:srgbClr val="F7D4DA"/>
             </a:solidFill>
           </a:ln>
         </p:spPr>
@@ -3986,7 +3986,7 @@
             <a:r>
               <a:rPr sz="3000" b="1" i="0">
                 <a:solidFill>
-                  <a:srgbClr val="7A1F2E"/>
+                  <a:srgbClr val="721D2B"/>
                 </a:solidFill>
               </a:rPr>
               <a:t>감사의 말씀</a:t>
@@ -4011,11 +4011,11 @@
             </a:avLst>
           </a:prstGeom>
           <a:solidFill>
-            <a:srgbClr val="FBEFF1"/>
+            <a:srgbClr val="FCF3F4"/>
           </a:solidFill>
           <a:ln w="12700">
             <a:solidFill>
-              <a:srgbClr val="F4CDD3"/>
+              <a:srgbClr val="F7D4DA"/>
             </a:solidFill>
           </a:ln>
         </p:spPr>
@@ -4154,7 +4154,7 @@
     <p:bg>
       <p:bgPr>
         <a:solidFill>
-          <a:srgbClr val="FBEFF1"/>
+          <a:srgbClr val="FCF3F4"/>
         </a:solidFill>
         <a:effectLst/>
       </p:bgPr>
@@ -4183,7 +4183,7 @@
           <a:noFill/>
           <a:ln w="28575">
             <a:solidFill>
-              <a:srgbClr val="CC334D"/>
+              <a:srgbClr val="DF3A55"/>
             </a:solidFill>
           </a:ln>
         </p:spPr>
@@ -4212,7 +4212,7 @@
           <a:noFill/>
           <a:ln w="9525">
             <a:solidFill>
-              <a:srgbClr val="F4CDD3"/>
+              <a:srgbClr val="F7D4DA"/>
             </a:solidFill>
           </a:ln>
         </p:spPr>
@@ -4254,7 +4254,7 @@
             <a:r>
               <a:rPr sz="3000" b="1" i="0">
                 <a:solidFill>
-                  <a:srgbClr val="7A1F2E"/>
+                  <a:srgbClr val="721D2B"/>
                 </a:solidFill>
               </a:rPr>
               <a:t>답례 안내</a:t>
@@ -4279,11 +4279,11 @@
             </a:avLst>
           </a:prstGeom>
           <a:solidFill>
-            <a:srgbClr val="FBEFF1"/>
+            <a:srgbClr val="FCF3F4"/>
           </a:solidFill>
           <a:ln w="15875">
             <a:solidFill>
-              <a:srgbClr val="F4CDD3"/>
+              <a:srgbClr val="F7D4DA"/>
             </a:solidFill>
           </a:ln>
         </p:spPr>
@@ -4310,7 +4310,7 @@
             <a:avLst/>
           </a:prstGeom>
           <a:solidFill>
-            <a:srgbClr val="CC334D"/>
+            <a:srgbClr val="DF3A55"/>
           </a:solidFill>
           <a:ln>
             <a:noFill/>
@@ -4368,7 +4368,7 @@
             <a:r>
               <a:rPr sz="1800" b="1" i="0">
                 <a:solidFill>
-                  <a:srgbClr val="7A1F2E"/>
+                  <a:srgbClr val="721D2B"/>
                 </a:solidFill>
               </a:rPr>
               <a:t>답례품</a:t>
@@ -4431,11 +4431,11 @@
             </a:avLst>
           </a:prstGeom>
           <a:solidFill>
-            <a:srgbClr val="FBEFF1"/>
+            <a:srgbClr val="FCF3F4"/>
           </a:solidFill>
           <a:ln w="15875">
             <a:solidFill>
-              <a:srgbClr val="F4CDD3"/>
+              <a:srgbClr val="F7D4DA"/>
             </a:solidFill>
           </a:ln>
         </p:spPr>
@@ -4462,7 +4462,7 @@
             <a:avLst/>
           </a:prstGeom>
           <a:solidFill>
-            <a:srgbClr val="CC334D"/>
+            <a:srgbClr val="DF3A55"/>
           </a:solidFill>
           <a:ln>
             <a:noFill/>
@@ -4520,7 +4520,7 @@
             <a:r>
               <a:rPr sz="1800" b="1" i="0">
                 <a:solidFill>
-                  <a:srgbClr val="7A1F2E"/>
+                  <a:srgbClr val="721D2B"/>
                 </a:solidFill>
               </a:rPr>
               <a:t>방명록</a:t>
@@ -4583,11 +4583,11 @@
             </a:avLst>
           </a:prstGeom>
           <a:solidFill>
-            <a:srgbClr val="FBEFF1"/>
+            <a:srgbClr val="FCF3F4"/>
           </a:solidFill>
           <a:ln w="15875">
             <a:solidFill>
-              <a:srgbClr val="F4CDD3"/>
+              <a:srgbClr val="F7D4DA"/>
             </a:solidFill>
           </a:ln>
         </p:spPr>
@@ -4614,7 +4614,7 @@
             <a:avLst/>
           </a:prstGeom>
           <a:solidFill>
-            <a:srgbClr val="CC334D"/>
+            <a:srgbClr val="DF3A55"/>
           </a:solidFill>
           <a:ln>
             <a:noFill/>
@@ -4672,7 +4672,7 @@
             <a:r>
               <a:rPr sz="1800" b="1" i="0">
                 <a:solidFill>
-                  <a:srgbClr val="7A1F2E"/>
+                  <a:srgbClr val="721D2B"/>
                 </a:solidFill>
               </a:rPr>
               <a:t>사진 · 영상</a:t>
@@ -4732,7 +4732,7 @@
     <p:bg>
       <p:bgPr>
         <a:solidFill>
-          <a:srgbClr val="FBEFF1"/>
+          <a:srgbClr val="FCF3F4"/>
         </a:solidFill>
         <a:effectLst/>
       </p:bgPr>
@@ -4761,7 +4761,7 @@
           <a:noFill/>
           <a:ln w="28575">
             <a:solidFill>
-              <a:srgbClr val="CC334D"/>
+              <a:srgbClr val="DF3A55"/>
             </a:solidFill>
           </a:ln>
         </p:spPr>
@@ -4790,7 +4790,7 @@
           <a:noFill/>
           <a:ln w="9525">
             <a:solidFill>
-              <a:srgbClr val="F4CDD3"/>
+              <a:srgbClr val="F7D4DA"/>
             </a:solidFill>
           </a:ln>
         </p:spPr>
@@ -4832,7 +4832,7 @@
             <a:r>
               <a:rPr sz="3000" b="1" i="0">
                 <a:solidFill>
-                  <a:srgbClr val="7A1F2E"/>
+                  <a:srgbClr val="721D2B"/>
                 </a:solidFill>
               </a:rPr>
               <a:t>웨딩 사진</a:t>
@@ -4857,11 +4857,11 @@
             </a:avLst>
           </a:prstGeom>
           <a:solidFill>
-            <a:srgbClr val="F4CDD3"/>
+            <a:srgbClr val="F7D4DA"/>
           </a:solidFill>
           <a:ln w="19050">
             <a:solidFill>
-              <a:srgbClr val="CC334D"/>
+              <a:srgbClr val="DF3A55"/>
             </a:solidFill>
             <a:prstDash val="dash"/>
           </a:ln>
@@ -4880,7 +4880,7 @@
             <a:r>
               <a:rPr sz="1200" b="0" i="0">
                 <a:solidFill>
-                  <a:srgbClr val="7A1F2E"/>
+                  <a:srgbClr val="721D2B"/>
                 </a:solidFill>
               </a:rPr>
               <a:t>사진 1</a:t>
@@ -4905,11 +4905,11 @@
             </a:avLst>
           </a:prstGeom>
           <a:solidFill>
-            <a:srgbClr val="F4CDD3"/>
+            <a:srgbClr val="F7D4DA"/>
           </a:solidFill>
           <a:ln w="19050">
             <a:solidFill>
-              <a:srgbClr val="CC334D"/>
+              <a:srgbClr val="DF3A55"/>
             </a:solidFill>
             <a:prstDash val="dash"/>
           </a:ln>
@@ -4928,7 +4928,7 @@
             <a:r>
               <a:rPr sz="1200" b="0" i="0">
                 <a:solidFill>
-                  <a:srgbClr val="7A1F2E"/>
+                  <a:srgbClr val="721D2B"/>
                 </a:solidFill>
               </a:rPr>
               <a:t>사진 2</a:t>
@@ -4953,11 +4953,11 @@
             </a:avLst>
           </a:prstGeom>
           <a:solidFill>
-            <a:srgbClr val="F4CDD3"/>
+            <a:srgbClr val="F7D4DA"/>
           </a:solidFill>
           <a:ln w="19050">
             <a:solidFill>
-              <a:srgbClr val="CC334D"/>
+              <a:srgbClr val="DF3A55"/>
             </a:solidFill>
             <a:prstDash val="dash"/>
           </a:ln>
@@ -4976,7 +4976,7 @@
             <a:r>
               <a:rPr sz="1200" b="0" i="0">
                 <a:solidFill>
-                  <a:srgbClr val="7A1F2E"/>
+                  <a:srgbClr val="721D2B"/>
                 </a:solidFill>
               </a:rPr>
               <a:t>사진 3</a:t>
@@ -5001,11 +5001,11 @@
             </a:avLst>
           </a:prstGeom>
           <a:solidFill>
-            <a:srgbClr val="F4CDD3"/>
+            <a:srgbClr val="F7D4DA"/>
           </a:solidFill>
           <a:ln w="19050">
             <a:solidFill>
-              <a:srgbClr val="CC334D"/>
+              <a:srgbClr val="DF3A55"/>
             </a:solidFill>
             <a:prstDash val="dash"/>
           </a:ln>
@@ -5024,7 +5024,7 @@
             <a:r>
               <a:rPr sz="1200" b="0" i="0">
                 <a:solidFill>
-                  <a:srgbClr val="7A1F2E"/>
+                  <a:srgbClr val="721D2B"/>
                 </a:solidFill>
               </a:rPr>
               <a:t>사진 4</a:t>
@@ -5049,11 +5049,11 @@
             </a:avLst>
           </a:prstGeom>
           <a:solidFill>
-            <a:srgbClr val="F4CDD3"/>
+            <a:srgbClr val="F7D4DA"/>
           </a:solidFill>
           <a:ln w="19050">
             <a:solidFill>
-              <a:srgbClr val="CC334D"/>
+              <a:srgbClr val="DF3A55"/>
             </a:solidFill>
             <a:prstDash val="dash"/>
           </a:ln>
@@ -5072,7 +5072,7 @@
             <a:r>
               <a:rPr sz="1200" b="0" i="0">
                 <a:solidFill>
-                  <a:srgbClr val="7A1F2E"/>
+                  <a:srgbClr val="721D2B"/>
                 </a:solidFill>
               </a:rPr>
               <a:t>사진 5</a:t>
@@ -5097,11 +5097,11 @@
             </a:avLst>
           </a:prstGeom>
           <a:solidFill>
-            <a:srgbClr val="F4CDD3"/>
+            <a:srgbClr val="F7D4DA"/>
           </a:solidFill>
           <a:ln w="19050">
             <a:solidFill>
-              <a:srgbClr val="CC334D"/>
+              <a:srgbClr val="DF3A55"/>
             </a:solidFill>
             <a:prstDash val="dash"/>
           </a:ln>
@@ -5120,7 +5120,7 @@
             <a:r>
               <a:rPr sz="1200" b="0" i="0">
                 <a:solidFill>
-                  <a:srgbClr val="7A1F2E"/>
+                  <a:srgbClr val="721D2B"/>
                 </a:solidFill>
               </a:rPr>
               <a:t>사진 6</a:t>
@@ -5200,7 +5200,7 @@
             <a:r>
               <a:rPr sz="3400" b="1" i="0">
                 <a:solidFill>
-                  <a:srgbClr val="7A1F2E"/>
+                  <a:srgbClr val="721D2B"/>
                 </a:solidFill>
               </a:rPr>
               <a:t>와 주셔서 고맙습니다</a:t>
@@ -5238,7 +5238,7 @@
             <a:r>
               <a:rPr sz="1700" b="0" i="1">
                 <a:solidFill>
-                  <a:srgbClr val="7A1F2E"/>
+                  <a:srgbClr val="721D2B"/>
                 </a:solidFill>
               </a:rPr>
               <a:t>잘 살겠습니다</a:t>
@@ -5303,34 +5303,34 @@
         <a:sysClr val="window" lastClr="FFFFFF"/>
       </a:lt1>
       <a:dk2>
-        <a:srgbClr val="7A1F2E"/>
+        <a:srgbClr val="721D2B"/>
       </a:dk2>
       <a:lt2>
-        <a:srgbClr val="FBEFF1"/>
+        <a:srgbClr val="FCF3F4"/>
       </a:lt2>
       <a:accent1>
-        <a:srgbClr val="CC334D"/>
+        <a:srgbClr val="DF3A55"/>
       </a:accent1>
       <a:accent2>
-        <a:srgbClr val="3B9158"/>
+        <a:srgbClr val="339941"/>
       </a:accent2>
       <a:accent3>
-        <a:srgbClr val="7A1F2E"/>
+        <a:srgbClr val="721D2B"/>
       </a:accent3>
       <a:accent4>
-        <a:srgbClr val="F4CDD3"/>
+        <a:srgbClr val="F7D4DA"/>
       </a:accent4>
       <a:accent5>
-        <a:srgbClr val="846252"/>
+        <a:srgbClr val="896A4B"/>
       </a:accent5>
       <a:accent6>
-        <a:srgbClr val="AF7982"/>
+        <a:srgbClr val="AA7780"/>
       </a:accent6>
       <a:hlink>
-        <a:srgbClr val="CC334D"/>
+        <a:srgbClr val="DF3A55"/>
       </a:hlink>
       <a:folHlink>
-        <a:srgbClr val="7A1F2E"/>
+        <a:srgbClr val="721D2B"/>
       </a:folHlink>
     </a:clrScheme>
     <a:fontScheme name="Office">

--- a/public/fun/pack/pptx/wedding/결혼식_10_감사·답례중심_어버이날꽃.pptx
+++ b/public/fun/pack/pptx/wedding/결혼식_10_감사·답례중심_어버이날꽃.pptx
@@ -3286,6 +3286,14 @@
 <file path=ppt/slides/slide1.xml><?xml version="1.0" encoding="utf-8"?>
 <p:sld xmlns:a="http://schemas.openxmlformats.org/drawingml/2006/main" xmlns:p="http://schemas.openxmlformats.org/presentationml/2006/main" xmlns:r="http://schemas.openxmlformats.org/officeDocument/2006/relationships">
   <p:cSld>
+    <p:bg>
+      <p:bgPr>
+        <a:solidFill>
+          <a:srgbClr val="FDEAED"/>
+        </a:solidFill>
+        <a:effectLst/>
+      </p:bgPr>
+    </p:bg>
     <p:spTree>
       <p:nvGrpSpPr>
         <p:cNvPr id="1" name=""/>
@@ -3293,30 +3301,116 @@
         <p:nvPr/>
       </p:nvGrpSpPr>
       <p:grpSpPr/>
-      <p:pic>
-        <p:nvPicPr>
-          <p:cNvPr id="3" name="표지 그림" descr="wedding-10.jpg"/>
-          <p:cNvPicPr>
-            <a:picLocks noChangeAspect="1"/>
-          </p:cNvPicPr>
+      <p:sp>
+        <p:nvSpPr>
+          <p:cNvPr id="3" name="사진 자리"/>
+          <p:cNvSpPr/>
           <p:nvPr/>
-        </p:nvPicPr>
-        <p:blipFill>
-          <a:blip r:embed="rId2"/>
-          <a:stretch>
-            <a:fillRect/>
-          </a:stretch>
-        </p:blipFill>
+        </p:nvSpPr>
         <p:spPr>
           <a:xfrm>
             <a:off x="0" y="0"/>
-            <a:ext cx="12191695" cy="6858000"/>
+            <a:ext cx="4389010" cy="6858000"/>
           </a:xfrm>
           <a:prstGeom prst="rect">
             <a:avLst/>
           </a:prstGeom>
-        </p:spPr>
-      </p:pic>
+          <a:solidFill>
+            <a:srgbClr val="F2A6B3"/>
+          </a:solidFill>
+          <a:ln>
+            <a:noFill/>
+          </a:ln>
+        </p:spPr>
+        <p:txBody>
+          <a:bodyPr rtlCol="0" anchor="ctr" wrap="square" lIns="54864" rIns="54864" tIns="27432" bIns="27432">
+            <a:noAutofit/>
+          </a:bodyPr>
+          <a:lstStyle/>
+          <a:p>
+            <a:pPr algn="ctr">
+              <a:lnSpc>
+                <a:spcPct val="100000"/>
+              </a:lnSpc>
+            </a:pPr>
+            <a:r>
+              <a:rPr sz="1400" b="0" i="0">
+                <a:solidFill>
+                  <a:srgbClr val="49272D"/>
+                </a:solidFill>
+              </a:rPr>
+              <a:t>사진을 넣어 주세요</a:t>
+            </a:r>
+          </a:p>
+        </p:txBody>
+      </p:sp>
+      <p:sp>
+        <p:nvSpPr>
+          <p:cNvPr id="4" name="장식"/>
+          <p:cNvSpPr/>
+          <p:nvPr/>
+        </p:nvSpPr>
+        <p:spPr>
+          <a:xfrm>
+            <a:off x="365750" y="365760"/>
+            <a:ext cx="3657508" cy="6126480"/>
+          </a:xfrm>
+          <a:prstGeom prst="rect">
+            <a:avLst/>
+          </a:prstGeom>
+          <a:noFill/>
+          <a:ln w="9525">
+            <a:solidFill>
+              <a:srgbClr val="26231F"/>
+            </a:solidFill>
+          </a:ln>
+        </p:spPr>
+        <p:txBody>
+          <a:bodyPr rtlCol="0" anchor="ctr"/>
+          <a:lstStyle/>
+          <a:p>
+            <a:pPr algn="ctr"/>
+          </a:p>
+        </p:txBody>
+      </p:sp>
+      <p:sp>
+        <p:nvSpPr>
+          <p:cNvPr id="5" name="라벨"/>
+          <p:cNvSpPr txBox="1"/>
+          <p:nvPr/>
+        </p:nvSpPr>
+        <p:spPr>
+          <a:xfrm>
+            <a:off x="6827349" y="2148840"/>
+            <a:ext cx="4632844" cy="274320"/>
+          </a:xfrm>
+          <a:prstGeom prst="rect">
+            <a:avLst/>
+          </a:prstGeom>
+          <a:noFill/>
+        </p:spPr>
+        <p:txBody>
+          <a:bodyPr wrap="square" lIns="54864" rIns="54864" tIns="27432" bIns="27432" anchor="t">
+            <a:noAutofit/>
+          </a:bodyPr>
+          <a:lstStyle/>
+          <a:p>
+            <a:pPr algn="l">
+              <a:lnSpc>
+                <a:spcPct val="115000"/>
+              </a:lnSpc>
+            </a:pPr>
+            <a:r>
+              <a:rPr sz="1000" b="1" i="0" spc="250">
+                <a:solidFill>
+                  <a:srgbClr val="26231F"/>
+                </a:solidFill>
+              </a:rPr>
+              <a:t>WEDDING</a:t>
+            </a:r>
+          </a:p>
+        </p:txBody>
+      </p:sp>
       <p:sp>
         <p:nvSpPr>
           <p:cNvPr id="2" name="Title 1"/>
@@ -3329,8 +3423,8 @@
         </p:nvSpPr>
         <p:spPr>
           <a:xfrm>
-            <a:off x="853418" y="2057400"/>
-            <a:ext cx="6095847" cy="1554480"/>
+            <a:off x="6827349" y="2606040"/>
+            <a:ext cx="4632844" cy="1188720"/>
           </a:xfrm>
         </p:spPr>
         <p:txBody>
@@ -3347,7 +3441,7 @@
             <a:r>
               <a:rPr sz="3600" b="1" i="0">
                 <a:solidFill>
-                  <a:srgbClr val="721D2B"/>
+                  <a:srgbClr val="26231F"/>
                 </a:solidFill>
               </a:rPr>
               <a:t>저희 결혼합니다</a:t>
@@ -3357,14 +3451,14 @@
       </p:sp>
       <p:sp>
         <p:nvSpPr>
-          <p:cNvPr id="4" name="한 줄 문구"/>
+          <p:cNvPr id="6" name="한 줄 문구"/>
           <p:cNvSpPr txBox="1"/>
           <p:nvPr/>
         </p:nvSpPr>
         <p:spPr>
           <a:xfrm>
-            <a:off x="853418" y="3749039"/>
-            <a:ext cx="6095847" cy="822960"/>
+            <a:off x="6827349" y="3886200"/>
+            <a:ext cx="4632844" cy="822960"/>
           </a:xfrm>
           <a:prstGeom prst="rect">
             <a:avLst/>
@@ -3383,9 +3477,9 @@
               </a:lnSpc>
             </a:pPr>
             <a:r>
-              <a:rPr sz="1700" b="0" i="1">
-                <a:solidFill>
-                  <a:srgbClr val="721D2B"/>
+              <a:rPr sz="1700" b="0" i="0">
+                <a:solidFill>
+                  <a:srgbClr val="26231F"/>
                 </a:solidFill>
               </a:rPr>
               <a:t>바쁘신 중에 와 주신 것 잊지 않겠습니다</a:t>
@@ -3395,14 +3489,14 @@
       </p:sp>
       <p:sp>
         <p:nvSpPr>
-          <p:cNvPr id="5" name="안내 문구"/>
+          <p:cNvPr id="7" name="안내 문구"/>
           <p:cNvSpPr txBox="1"/>
           <p:nvPr/>
         </p:nvSpPr>
         <p:spPr>
           <a:xfrm>
-            <a:off x="853418" y="4617720"/>
-            <a:ext cx="6095847" cy="914400"/>
+            <a:off x="6827349" y="4754880"/>
+            <a:ext cx="4632844" cy="914400"/>
           </a:xfrm>
           <a:prstGeom prst="rect">
             <a:avLst/>
@@ -3423,7 +3517,7 @@
             <a:r>
               <a:rPr sz="1400" b="0" i="0">
                 <a:solidFill>
-                  <a:srgbClr val="666666"/>
+                  <a:srgbClr val="26231F"/>
                 </a:solidFill>
               </a:rPr>
               <a:t>신랑 이름 ♥ 신부 이름</a:t>
@@ -3438,10 +3532,10 @@
             <a:r>
               <a:rPr sz="1400" b="0" i="0">
                 <a:solidFill>
-                  <a:srgbClr val="666666"/>
+                  <a:srgbClr val="26231F"/>
                 </a:solidFill>
               </a:rPr>
-              <a:t>2027. 00. 00 · 예식장 이름</a:t>
+              <a:t>날짜 입력 · 예식장 이름</a:t>
             </a:r>
           </a:p>
         </p:txBody>
@@ -3460,7 +3554,7 @@
     <p:bg>
       <p:bgPr>
         <a:solidFill>
-          <a:srgbClr val="FCF3F4"/>
+          <a:srgbClr val="FFFFFF"/>
         </a:solidFill>
         <a:effectLst/>
       </p:bgPr>
@@ -3474,77 +3568,77 @@
       <p:grpSpPr/>
       <p:sp>
         <p:nvSpPr>
-          <p:cNvPr id="3" name="장식"/>
+          <p:cNvPr id="3" name="포인트"/>
           <p:cNvSpPr/>
           <p:nvPr/>
         </p:nvSpPr>
         <p:spPr>
           <a:xfrm>
-            <a:off x="256032" y="256032"/>
-            <a:ext cx="11679631" cy="6345936"/>
+            <a:off x="5958687" y="246888"/>
+            <a:ext cx="274320" cy="274320"/>
+          </a:xfrm>
+          <a:prstGeom prst="mathPlus">
+            <a:avLst/>
+          </a:prstGeom>
+          <a:solidFill>
+            <a:srgbClr val="ED97A5"/>
+          </a:solidFill>
+          <a:ln>
+            <a:noFill/>
+          </a:ln>
+        </p:spPr>
+        <p:txBody>
+          <a:bodyPr rtlCol="0" anchor="ctr"/>
+          <a:lstStyle/>
+          <a:p>
+            <a:pPr algn="ctr"/>
+          </a:p>
+        </p:txBody>
+      </p:sp>
+      <p:sp>
+        <p:nvSpPr>
+          <p:cNvPr id="4" name="장식"/>
+          <p:cNvSpPr/>
+          <p:nvPr/>
+        </p:nvSpPr>
+        <p:spPr>
+          <a:xfrm>
+            <a:off x="5684367" y="1572768"/>
+            <a:ext cx="822960" cy="22860"/>
+          </a:xfrm>
+          <a:prstGeom prst="rect">
+            <a:avLst/>
+          </a:prstGeom>
+          <a:solidFill>
+            <a:srgbClr val="ED97A5"/>
+          </a:solidFill>
+          <a:ln>
+            <a:noFill/>
+          </a:ln>
+        </p:spPr>
+        <p:txBody>
+          <a:bodyPr rtlCol="0" anchor="ctr"/>
+          <a:lstStyle/>
+          <a:p>
+            <a:pPr algn="ctr"/>
+          </a:p>
+        </p:txBody>
+      </p:sp>
+      <p:sp>
+        <p:nvSpPr>
+          <p:cNvPr id="5" name="상단 라벨"/>
+          <p:cNvSpPr txBox="1"/>
+          <p:nvPr/>
+        </p:nvSpPr>
+        <p:spPr>
+          <a:xfrm>
+            <a:off x="640080" y="182880"/>
+            <a:ext cx="3657600" cy="274320"/>
           </a:xfrm>
           <a:prstGeom prst="rect">
             <a:avLst/>
           </a:prstGeom>
           <a:noFill/>
-          <a:ln w="28575">
-            <a:solidFill>
-              <a:srgbClr val="DF3A55"/>
-            </a:solidFill>
-          </a:ln>
-        </p:spPr>
-        <p:txBody>
-          <a:bodyPr rtlCol="0" anchor="ctr"/>
-          <a:lstStyle/>
-          <a:p>
-            <a:pPr algn="ctr"/>
-          </a:p>
-        </p:txBody>
-      </p:sp>
-      <p:sp>
-        <p:nvSpPr>
-          <p:cNvPr id="4" name="장식"/>
-          <p:cNvSpPr/>
-          <p:nvPr/>
-        </p:nvSpPr>
-        <p:spPr>
-          <a:xfrm>
-            <a:off x="384048" y="384048"/>
-            <a:ext cx="11423599" cy="6089904"/>
-          </a:xfrm>
-          <a:prstGeom prst="rect">
-            <a:avLst/>
-          </a:prstGeom>
-          <a:noFill/>
-          <a:ln w="9525">
-            <a:solidFill>
-              <a:srgbClr val="F7D4DA"/>
-            </a:solidFill>
-          </a:ln>
-        </p:spPr>
-        <p:txBody>
-          <a:bodyPr rtlCol="0" anchor="ctr"/>
-          <a:lstStyle/>
-          <a:p>
-            <a:pPr algn="ctr"/>
-          </a:p>
-        </p:txBody>
-      </p:sp>
-      <p:sp>
-        <p:nvSpPr>
-          <p:cNvPr id="2" name="Title 1"/>
-          <p:cNvSpPr>
-            <a:spLocks noGrp="1"/>
-          </p:cNvSpPr>
-          <p:nvPr>
-            <p:ph type="title"/>
-          </p:nvPr>
-        </p:nvSpPr>
-        <p:spPr>
-          <a:xfrm>
-            <a:off x="822960" y="548640"/>
-            <a:ext cx="9265615" cy="822960"/>
-          </a:xfrm>
         </p:spPr>
         <p:txBody>
           <a:bodyPr wrap="square" lIns="54864" rIns="54864" tIns="27432" bIns="27432" anchor="ctr">
@@ -3553,6 +3647,44 @@
           <a:lstStyle/>
           <a:p>
             <a:pPr algn="l">
+              <a:lnSpc>
+                <a:spcPct val="115000"/>
+              </a:lnSpc>
+            </a:pPr>
+            <a:r>
+              <a:rPr sz="800" b="1" i="0" spc="250">
+                <a:solidFill>
+                  <a:srgbClr val="8E8780"/>
+                </a:solidFill>
+              </a:rPr>
+              <a:t>WEDDING</a:t>
+            </a:r>
+          </a:p>
+        </p:txBody>
+      </p:sp>
+      <p:sp>
+        <p:nvSpPr>
+          <p:cNvPr id="2" name="Title 1"/>
+          <p:cNvSpPr>
+            <a:spLocks noGrp="1"/>
+          </p:cNvSpPr>
+          <p:nvPr>
+            <p:ph type="title"/>
+          </p:nvPr>
+        </p:nvSpPr>
+        <p:spPr>
+          <a:xfrm>
+            <a:off x="1371600" y="640080"/>
+            <a:ext cx="9448495" cy="868680"/>
+          </a:xfrm>
+        </p:spPr>
+        <p:txBody>
+          <a:bodyPr wrap="square" lIns="54864" rIns="54864" tIns="27432" bIns="27432" anchor="ctr">
+            <a:noAutofit/>
+          </a:bodyPr>
+          <a:lstStyle/>
+          <a:p>
+            <a:pPr algn="ctr">
               <a:lnSpc>
                 <a:spcPct val="105000"/>
               </a:lnSpc>
@@ -3560,7 +3692,7 @@
             <a:r>
               <a:rPr sz="3000" b="1" i="0">
                 <a:solidFill>
-                  <a:srgbClr val="721D2B"/>
+                  <a:srgbClr val="26231F"/>
                 </a:solidFill>
               </a:rPr>
               <a:t>신랑 · 신부 소개</a:t>
@@ -3570,25 +3702,23 @@
       </p:sp>
       <p:sp>
         <p:nvSpPr>
-          <p:cNvPr id="5" name="사진 자리"/>
+          <p:cNvPr id="6" name="사진 자리"/>
           <p:cNvSpPr/>
           <p:nvPr/>
         </p:nvSpPr>
         <p:spPr>
           <a:xfrm>
-            <a:off x="2076373" y="1554480"/>
-            <a:ext cx="2308860" cy="2308860"/>
+            <a:off x="1996363" y="1783080"/>
+            <a:ext cx="2286000" cy="2286000"/>
           </a:xfrm>
           <a:prstGeom prst="ellipse">
             <a:avLst/>
           </a:prstGeom>
           <a:solidFill>
-            <a:srgbClr val="F7D4DA"/>
+            <a:srgbClr val="FAD1D8"/>
           </a:solidFill>
           <a:ln w="19050">
-            <a:solidFill>
-              <a:srgbClr val="DF3A55"/>
-            </a:solidFill>
+            <a:noFill/>
             <a:prstDash val="dash"/>
           </a:ln>
         </p:spPr>
@@ -3606,7 +3736,7 @@
             <a:r>
               <a:rPr sz="1200" b="0" i="0">
                 <a:solidFill>
-                  <a:srgbClr val="721D2B"/>
+                  <a:srgbClr val="8E8780"/>
                 </a:solidFill>
               </a:rPr>
               <a:t>사진</a:t>
@@ -3616,14 +3746,14 @@
       </p:sp>
       <p:sp>
         <p:nvSpPr>
-          <p:cNvPr id="6" name="TextBox 5"/>
+          <p:cNvPr id="7" name="TextBox 6"/>
           <p:cNvSpPr txBox="1"/>
           <p:nvPr/>
         </p:nvSpPr>
         <p:spPr>
           <a:xfrm>
-            <a:off x="822960" y="3954779"/>
-            <a:ext cx="4815687" cy="411480"/>
+            <a:off x="640080" y="4160520"/>
+            <a:ext cx="4998567" cy="411480"/>
           </a:xfrm>
           <a:prstGeom prst="rect">
             <a:avLst/>
@@ -3644,7 +3774,7 @@
             <a:r>
               <a:rPr sz="1600" b="1" i="0">
                 <a:solidFill>
-                  <a:srgbClr val="721D2B"/>
+                  <a:srgbClr val="49272D"/>
                 </a:solidFill>
               </a:rPr>
               <a:t>신랑</a:t>
@@ -3654,14 +3784,14 @@
       </p:sp>
       <p:sp>
         <p:nvSpPr>
-          <p:cNvPr id="7" name="TextBox 6"/>
+          <p:cNvPr id="8" name="TextBox 7"/>
           <p:cNvSpPr txBox="1"/>
           <p:nvPr/>
         </p:nvSpPr>
         <p:spPr>
           <a:xfrm>
-            <a:off x="914400" y="4411979"/>
-            <a:ext cx="4632807" cy="1760219"/>
+            <a:off x="731519" y="4617720"/>
+            <a:ext cx="4815687" cy="1737360"/>
           </a:xfrm>
           <a:prstGeom prst="rect">
             <a:avLst/>
@@ -3722,25 +3852,23 @@
       </p:sp>
       <p:sp>
         <p:nvSpPr>
-          <p:cNvPr id="8" name="사진 자리"/>
+          <p:cNvPr id="9" name="사진 자리"/>
           <p:cNvSpPr/>
           <p:nvPr/>
         </p:nvSpPr>
         <p:spPr>
           <a:xfrm>
-            <a:off x="7806461" y="1554480"/>
-            <a:ext cx="2308860" cy="2308860"/>
+            <a:off x="7909331" y="1783080"/>
+            <a:ext cx="2286000" cy="2286000"/>
           </a:xfrm>
           <a:prstGeom prst="ellipse">
             <a:avLst/>
           </a:prstGeom>
           <a:solidFill>
-            <a:srgbClr val="F7D4DA"/>
+            <a:srgbClr val="FAD1D8"/>
           </a:solidFill>
           <a:ln w="19050">
-            <a:solidFill>
-              <a:srgbClr val="DF3A55"/>
-            </a:solidFill>
+            <a:noFill/>
             <a:prstDash val="dash"/>
           </a:ln>
         </p:spPr>
@@ -3758,7 +3886,7 @@
             <a:r>
               <a:rPr sz="1200" b="0" i="0">
                 <a:solidFill>
-                  <a:srgbClr val="721D2B"/>
+                  <a:srgbClr val="8E8780"/>
                 </a:solidFill>
               </a:rPr>
               <a:t>사진</a:t>
@@ -3768,14 +3896,14 @@
       </p:sp>
       <p:sp>
         <p:nvSpPr>
-          <p:cNvPr id="9" name="TextBox 8"/>
+          <p:cNvPr id="10" name="TextBox 9"/>
           <p:cNvSpPr txBox="1"/>
           <p:nvPr/>
         </p:nvSpPr>
         <p:spPr>
           <a:xfrm>
-            <a:off x="6553047" y="3954779"/>
-            <a:ext cx="4815687" cy="411480"/>
+            <a:off x="6553047" y="4160520"/>
+            <a:ext cx="4998567" cy="411480"/>
           </a:xfrm>
           <a:prstGeom prst="rect">
             <a:avLst/>
@@ -3796,7 +3924,7 @@
             <a:r>
               <a:rPr sz="1600" b="1" i="0">
                 <a:solidFill>
-                  <a:srgbClr val="721D2B"/>
+                  <a:srgbClr val="49272D"/>
                 </a:solidFill>
               </a:rPr>
               <a:t>신부</a:t>
@@ -3806,14 +3934,14 @@
       </p:sp>
       <p:sp>
         <p:nvSpPr>
-          <p:cNvPr id="10" name="TextBox 9"/>
+          <p:cNvPr id="11" name="TextBox 10"/>
           <p:cNvSpPr txBox="1"/>
           <p:nvPr/>
         </p:nvSpPr>
         <p:spPr>
           <a:xfrm>
-            <a:off x="6644487" y="4411979"/>
-            <a:ext cx="4632807" cy="1760219"/>
+            <a:off x="6644487" y="4617720"/>
+            <a:ext cx="4815687" cy="1737360"/>
           </a:xfrm>
           <a:prstGeom prst="rect">
             <a:avLst/>
@@ -3886,7 +4014,7 @@
     <p:bg>
       <p:bgPr>
         <a:solidFill>
-          <a:srgbClr val="FCF3F4"/>
+          <a:srgbClr val="FFFFFF"/>
         </a:solidFill>
         <a:effectLst/>
       </p:bgPr>
@@ -3900,77 +4028,77 @@
       <p:grpSpPr/>
       <p:sp>
         <p:nvSpPr>
-          <p:cNvPr id="3" name="장식"/>
+          <p:cNvPr id="3" name="포인트"/>
           <p:cNvSpPr/>
           <p:nvPr/>
         </p:nvSpPr>
         <p:spPr>
           <a:xfrm>
-            <a:off x="256032" y="256032"/>
-            <a:ext cx="11679631" cy="6345936"/>
+            <a:off x="5958687" y="246888"/>
+            <a:ext cx="274320" cy="274320"/>
+          </a:xfrm>
+          <a:prstGeom prst="mathPlus">
+            <a:avLst/>
+          </a:prstGeom>
+          <a:solidFill>
+            <a:srgbClr val="ED97A5"/>
+          </a:solidFill>
+          <a:ln>
+            <a:noFill/>
+          </a:ln>
+        </p:spPr>
+        <p:txBody>
+          <a:bodyPr rtlCol="0" anchor="ctr"/>
+          <a:lstStyle/>
+          <a:p>
+            <a:pPr algn="ctr"/>
+          </a:p>
+        </p:txBody>
+      </p:sp>
+      <p:sp>
+        <p:nvSpPr>
+          <p:cNvPr id="4" name="장식"/>
+          <p:cNvSpPr/>
+          <p:nvPr/>
+        </p:nvSpPr>
+        <p:spPr>
+          <a:xfrm>
+            <a:off x="5684367" y="1572768"/>
+            <a:ext cx="822960" cy="22860"/>
+          </a:xfrm>
+          <a:prstGeom prst="rect">
+            <a:avLst/>
+          </a:prstGeom>
+          <a:solidFill>
+            <a:srgbClr val="ED97A5"/>
+          </a:solidFill>
+          <a:ln>
+            <a:noFill/>
+          </a:ln>
+        </p:spPr>
+        <p:txBody>
+          <a:bodyPr rtlCol="0" anchor="ctr"/>
+          <a:lstStyle/>
+          <a:p>
+            <a:pPr algn="ctr"/>
+          </a:p>
+        </p:txBody>
+      </p:sp>
+      <p:sp>
+        <p:nvSpPr>
+          <p:cNvPr id="5" name="상단 라벨"/>
+          <p:cNvSpPr txBox="1"/>
+          <p:nvPr/>
+        </p:nvSpPr>
+        <p:spPr>
+          <a:xfrm>
+            <a:off x="640080" y="182880"/>
+            <a:ext cx="3657600" cy="274320"/>
           </a:xfrm>
           <a:prstGeom prst="rect">
             <a:avLst/>
           </a:prstGeom>
           <a:noFill/>
-          <a:ln w="28575">
-            <a:solidFill>
-              <a:srgbClr val="DF3A55"/>
-            </a:solidFill>
-          </a:ln>
-        </p:spPr>
-        <p:txBody>
-          <a:bodyPr rtlCol="0" anchor="ctr"/>
-          <a:lstStyle/>
-          <a:p>
-            <a:pPr algn="ctr"/>
-          </a:p>
-        </p:txBody>
-      </p:sp>
-      <p:sp>
-        <p:nvSpPr>
-          <p:cNvPr id="4" name="장식"/>
-          <p:cNvSpPr/>
-          <p:nvPr/>
-        </p:nvSpPr>
-        <p:spPr>
-          <a:xfrm>
-            <a:off x="384048" y="384048"/>
-            <a:ext cx="11423599" cy="6089904"/>
-          </a:xfrm>
-          <a:prstGeom prst="rect">
-            <a:avLst/>
-          </a:prstGeom>
-          <a:noFill/>
-          <a:ln w="9525">
-            <a:solidFill>
-              <a:srgbClr val="F7D4DA"/>
-            </a:solidFill>
-          </a:ln>
-        </p:spPr>
-        <p:txBody>
-          <a:bodyPr rtlCol="0" anchor="ctr"/>
-          <a:lstStyle/>
-          <a:p>
-            <a:pPr algn="ctr"/>
-          </a:p>
-        </p:txBody>
-      </p:sp>
-      <p:sp>
-        <p:nvSpPr>
-          <p:cNvPr id="2" name="Title 1"/>
-          <p:cNvSpPr>
-            <a:spLocks noGrp="1"/>
-          </p:cNvSpPr>
-          <p:nvPr>
-            <p:ph type="title"/>
-          </p:nvPr>
-        </p:nvSpPr>
-        <p:spPr>
-          <a:xfrm>
-            <a:off x="822960" y="548640"/>
-            <a:ext cx="9265615" cy="822960"/>
-          </a:xfrm>
         </p:spPr>
         <p:txBody>
           <a:bodyPr wrap="square" lIns="54864" rIns="54864" tIns="27432" bIns="27432" anchor="ctr">
@@ -3979,6 +4107,44 @@
           <a:lstStyle/>
           <a:p>
             <a:pPr algn="l">
+              <a:lnSpc>
+                <a:spcPct val="115000"/>
+              </a:lnSpc>
+            </a:pPr>
+            <a:r>
+              <a:rPr sz="800" b="1" i="0" spc="250">
+                <a:solidFill>
+                  <a:srgbClr val="8E8780"/>
+                </a:solidFill>
+              </a:rPr>
+              <a:t>WEDDING</a:t>
+            </a:r>
+          </a:p>
+        </p:txBody>
+      </p:sp>
+      <p:sp>
+        <p:nvSpPr>
+          <p:cNvPr id="2" name="Title 1"/>
+          <p:cNvSpPr>
+            <a:spLocks noGrp="1"/>
+          </p:cNvSpPr>
+          <p:nvPr>
+            <p:ph type="title"/>
+          </p:nvPr>
+        </p:nvSpPr>
+        <p:spPr>
+          <a:xfrm>
+            <a:off x="1371600" y="640080"/>
+            <a:ext cx="9448495" cy="868680"/>
+          </a:xfrm>
+        </p:spPr>
+        <p:txBody>
+          <a:bodyPr wrap="square" lIns="54864" rIns="54864" tIns="27432" bIns="27432" anchor="ctr">
+            <a:noAutofit/>
+          </a:bodyPr>
+          <a:lstStyle/>
+          <a:p>
+            <a:pPr algn="ctr">
               <a:lnSpc>
                 <a:spcPct val="105000"/>
               </a:lnSpc>
@@ -3986,7 +4152,7 @@
             <a:r>
               <a:rPr sz="3000" b="1" i="0">
                 <a:solidFill>
-                  <a:srgbClr val="721D2B"/>
+                  <a:srgbClr val="26231F"/>
                 </a:solidFill>
               </a:rPr>
               <a:t>감사의 말씀</a:t>
@@ -3996,26 +4162,26 @@
       </p:sp>
       <p:sp>
         <p:nvSpPr>
-          <p:cNvPr id="5" name="감사 글 칸"/>
+          <p:cNvPr id="6" name="감사 글 칸"/>
           <p:cNvSpPr/>
           <p:nvPr/>
         </p:nvSpPr>
         <p:spPr>
           <a:xfrm>
-            <a:off x="822960" y="1554480"/>
-            <a:ext cx="10545775" cy="4617720"/>
+            <a:off x="640080" y="1783080"/>
+            <a:ext cx="10911535" cy="4572000"/>
           </a:xfrm>
           <a:prstGeom prst="roundRect">
             <a:avLst>
-              <a:gd name="adj" fmla="val 8000"/>
+              <a:gd name="adj" fmla="val 7000"/>
             </a:avLst>
           </a:prstGeom>
           <a:solidFill>
-            <a:srgbClr val="FCF3F4"/>
+            <a:srgbClr val="FFFFFF"/>
           </a:solidFill>
           <a:ln w="12700">
             <a:solidFill>
-              <a:srgbClr val="F7D4DA"/>
+              <a:srgbClr val="F2A6B3"/>
             </a:solidFill>
           </a:ln>
         </p:spPr>
@@ -4029,14 +4195,14 @@
       </p:sp>
       <p:sp>
         <p:nvSpPr>
-          <p:cNvPr id="6" name="감사 글"/>
+          <p:cNvPr id="7" name="감사 글"/>
           <p:cNvSpPr txBox="1"/>
           <p:nvPr/>
         </p:nvSpPr>
         <p:spPr>
           <a:xfrm>
-            <a:off x="1280160" y="1920240"/>
-            <a:ext cx="9631375" cy="3886200"/>
+            <a:off x="1097280" y="2148840"/>
+            <a:ext cx="9997135" cy="3840480"/>
           </a:xfrm>
           <a:prstGeom prst="rect">
             <a:avLst/>
@@ -4057,7 +4223,7 @@
             <a:r>
               <a:rPr sz="2000" b="0" i="0">
                 <a:solidFill>
-                  <a:srgbClr val="2B2B2B"/>
+                  <a:srgbClr val="26231F"/>
                 </a:solidFill>
               </a:rPr>
               <a:t>바쁘신 중에 와 주셔서 고맙습니다.</a:t>
@@ -4072,7 +4238,7 @@
             <a:r>
               <a:rPr sz="2000" b="0" i="0">
                 <a:solidFill>
-                  <a:srgbClr val="2B2B2B"/>
+                  <a:srgbClr val="26231F"/>
                 </a:solidFill>
               </a:rPr>
               <a:t/>
@@ -4087,7 +4253,7 @@
             <a:r>
               <a:rPr sz="2000" b="0" i="0">
                 <a:solidFill>
-                  <a:srgbClr val="2B2B2B"/>
+                  <a:srgbClr val="26231F"/>
                 </a:solidFill>
               </a:rPr>
               <a:t>보내 주신 마음 잊지 않고</a:t>
@@ -4102,7 +4268,7 @@
             <a:r>
               <a:rPr sz="2000" b="0" i="0">
                 <a:solidFill>
-                  <a:srgbClr val="2B2B2B"/>
+                  <a:srgbClr val="26231F"/>
                 </a:solidFill>
               </a:rPr>
               <a:t>잘 살겠습니다.</a:t>
@@ -4117,7 +4283,7 @@
             <a:r>
               <a:rPr sz="2000" b="0" i="0">
                 <a:solidFill>
-                  <a:srgbClr val="2B2B2B"/>
+                  <a:srgbClr val="26231F"/>
                 </a:solidFill>
               </a:rPr>
               <a:t/>
@@ -4132,7 +4298,7 @@
             <a:r>
               <a:rPr sz="2000" b="0" i="0">
                 <a:solidFill>
-                  <a:srgbClr val="2B2B2B"/>
+                  <a:srgbClr val="26231F"/>
                 </a:solidFill>
               </a:rPr>
               <a:t>신랑 · 신부 드림</a:t>
@@ -4154,7 +4320,7 @@
     <p:bg>
       <p:bgPr>
         <a:solidFill>
-          <a:srgbClr val="FCF3F4"/>
+          <a:srgbClr val="FFFFFF"/>
         </a:solidFill>
         <a:effectLst/>
       </p:bgPr>
@@ -4168,186 +4334,72 @@
       <p:grpSpPr/>
       <p:sp>
         <p:nvSpPr>
-          <p:cNvPr id="3" name="장식"/>
+          <p:cNvPr id="3" name="포인트"/>
           <p:cNvSpPr/>
           <p:nvPr/>
         </p:nvSpPr>
         <p:spPr>
           <a:xfrm>
-            <a:off x="256032" y="256032"/>
-            <a:ext cx="11679631" cy="6345936"/>
-          </a:xfrm>
-          <a:prstGeom prst="rect">
-            <a:avLst/>
-          </a:prstGeom>
-          <a:noFill/>
-          <a:ln w="28575">
-            <a:solidFill>
-              <a:srgbClr val="DF3A55"/>
-            </a:solidFill>
-          </a:ln>
-        </p:spPr>
-        <p:txBody>
-          <a:bodyPr rtlCol="0" anchor="ctr"/>
-          <a:lstStyle/>
-          <a:p>
-            <a:pPr algn="ctr"/>
-          </a:p>
-        </p:txBody>
-      </p:sp>
-      <p:sp>
-        <p:nvSpPr>
-          <p:cNvPr id="4" name="장식"/>
-          <p:cNvSpPr/>
-          <p:nvPr/>
-        </p:nvSpPr>
-        <p:spPr>
-          <a:xfrm>
-            <a:off x="384048" y="384048"/>
-            <a:ext cx="11423599" cy="6089904"/>
-          </a:xfrm>
-          <a:prstGeom prst="rect">
-            <a:avLst/>
-          </a:prstGeom>
-          <a:noFill/>
-          <a:ln w="9525">
-            <a:solidFill>
-              <a:srgbClr val="F7D4DA"/>
-            </a:solidFill>
-          </a:ln>
-        </p:spPr>
-        <p:txBody>
-          <a:bodyPr rtlCol="0" anchor="ctr"/>
-          <a:lstStyle/>
-          <a:p>
-            <a:pPr algn="ctr"/>
-          </a:p>
-        </p:txBody>
-      </p:sp>
-      <p:sp>
-        <p:nvSpPr>
-          <p:cNvPr id="2" name="Title 1"/>
-          <p:cNvSpPr>
-            <a:spLocks noGrp="1"/>
-          </p:cNvSpPr>
-          <p:nvPr>
-            <p:ph type="title"/>
-          </p:nvPr>
-        </p:nvSpPr>
-        <p:spPr>
-          <a:xfrm>
-            <a:off x="822960" y="548640"/>
-            <a:ext cx="9265615" cy="822960"/>
-          </a:xfrm>
-        </p:spPr>
-        <p:txBody>
-          <a:bodyPr wrap="square" lIns="54864" rIns="54864" tIns="27432" bIns="27432" anchor="ctr">
-            <a:noAutofit/>
-          </a:bodyPr>
-          <a:lstStyle/>
-          <a:p>
-            <a:pPr algn="l">
-              <a:lnSpc>
-                <a:spcPct val="105000"/>
-              </a:lnSpc>
-            </a:pPr>
-            <a:r>
-              <a:rPr sz="3000" b="1" i="0">
-                <a:solidFill>
-                  <a:srgbClr val="721D2B"/>
-                </a:solidFill>
-              </a:rPr>
-              <a:t>답례 안내</a:t>
-            </a:r>
-          </a:p>
-        </p:txBody>
-      </p:sp>
-      <p:sp>
-        <p:nvSpPr>
-          <p:cNvPr id="5" name="카드 1"/>
-          <p:cNvSpPr/>
-          <p:nvPr/>
-        </p:nvSpPr>
-        <p:spPr>
-          <a:xfrm>
-            <a:off x="822960" y="1554480"/>
-            <a:ext cx="3362858" cy="4617720"/>
-          </a:xfrm>
-          <a:prstGeom prst="roundRect">
-            <a:avLst>
-              <a:gd name="adj" fmla="val 8000"/>
-            </a:avLst>
-          </a:prstGeom>
-          <a:solidFill>
-            <a:srgbClr val="FCF3F4"/>
-          </a:solidFill>
-          <a:ln w="15875">
-            <a:solidFill>
-              <a:srgbClr val="F7D4DA"/>
-            </a:solidFill>
-          </a:ln>
-        </p:spPr>
-        <p:txBody>
-          <a:bodyPr rtlCol="0" anchor="ctr"/>
-          <a:lstStyle/>
-          <a:p>
-            <a:pPr algn="ctr"/>
-          </a:p>
-        </p:txBody>
-      </p:sp>
-      <p:sp>
-        <p:nvSpPr>
-          <p:cNvPr id="6" name="번호 1"/>
-          <p:cNvSpPr/>
-          <p:nvPr/>
-        </p:nvSpPr>
-        <p:spPr>
-          <a:xfrm>
-            <a:off x="1005840" y="1737360"/>
-            <a:ext cx="457200" cy="457200"/>
-          </a:xfrm>
-          <a:prstGeom prst="ellipse">
+            <a:off x="5958687" y="246888"/>
+            <a:ext cx="274320" cy="274320"/>
+          </a:xfrm>
+          <a:prstGeom prst="mathPlus">
             <a:avLst/>
           </a:prstGeom>
           <a:solidFill>
-            <a:srgbClr val="DF3A55"/>
+            <a:srgbClr val="ED97A5"/>
           </a:solidFill>
           <a:ln>
             <a:noFill/>
           </a:ln>
         </p:spPr>
         <p:txBody>
-          <a:bodyPr rtlCol="0" anchor="ctr" wrap="square" lIns="54864" rIns="54864" tIns="27432" bIns="27432">
-            <a:noAutofit/>
-          </a:bodyPr>
-          <a:lstStyle/>
-          <a:p>
-            <a:pPr algn="ctr">
-              <a:lnSpc>
-                <a:spcPct val="100000"/>
-              </a:lnSpc>
-            </a:pPr>
-            <a:r>
-              <a:rPr sz="1600" b="1" i="0">
-                <a:solidFill>
-                  <a:srgbClr val="FFFFFF"/>
-                </a:solidFill>
-              </a:rPr>
-              <a:t>1</a:t>
-            </a:r>
-          </a:p>
-        </p:txBody>
-      </p:sp>
-      <p:sp>
-        <p:nvSpPr>
-          <p:cNvPr id="7" name="TextBox 6"/>
+          <a:bodyPr rtlCol="0" anchor="ctr"/>
+          <a:lstStyle/>
+          <a:p>
+            <a:pPr algn="ctr"/>
+          </a:p>
+        </p:txBody>
+      </p:sp>
+      <p:sp>
+        <p:nvSpPr>
+          <p:cNvPr id="4" name="장식"/>
+          <p:cNvSpPr/>
+          <p:nvPr/>
+        </p:nvSpPr>
+        <p:spPr>
+          <a:xfrm>
+            <a:off x="5684367" y="1572768"/>
+            <a:ext cx="822960" cy="22860"/>
+          </a:xfrm>
+          <a:prstGeom prst="rect">
+            <a:avLst/>
+          </a:prstGeom>
+          <a:solidFill>
+            <a:srgbClr val="ED97A5"/>
+          </a:solidFill>
+          <a:ln>
+            <a:noFill/>
+          </a:ln>
+        </p:spPr>
+        <p:txBody>
+          <a:bodyPr rtlCol="0" anchor="ctr"/>
+          <a:lstStyle/>
+          <a:p>
+            <a:pPr algn="ctr"/>
+          </a:p>
+        </p:txBody>
+      </p:sp>
+      <p:sp>
+        <p:nvSpPr>
+          <p:cNvPr id="5" name="상단 라벨"/>
           <p:cNvSpPr txBox="1"/>
           <p:nvPr/>
         </p:nvSpPr>
         <p:spPr>
           <a:xfrm>
-            <a:off x="960120" y="2331720"/>
-            <a:ext cx="3088538" cy="640080"/>
+            <a:off x="640080" y="182880"/>
+            <a:ext cx="3657600" cy="274320"/>
           </a:xfrm>
           <a:prstGeom prst="rect">
             <a:avLst/>
@@ -4366,12 +4418,121 @@
               </a:lnSpc>
             </a:pPr>
             <a:r>
-              <a:rPr sz="1800" b="1" i="0">
-                <a:solidFill>
-                  <a:srgbClr val="721D2B"/>
+              <a:rPr sz="800" b="1" i="0" spc="250">
+                <a:solidFill>
+                  <a:srgbClr val="8E8780"/>
                 </a:solidFill>
               </a:rPr>
-              <a:t>답례품</a:t>
+              <a:t>WEDDING</a:t>
+            </a:r>
+          </a:p>
+        </p:txBody>
+      </p:sp>
+      <p:sp>
+        <p:nvSpPr>
+          <p:cNvPr id="2" name="Title 1"/>
+          <p:cNvSpPr>
+            <a:spLocks noGrp="1"/>
+          </p:cNvSpPr>
+          <p:nvPr>
+            <p:ph type="title"/>
+          </p:nvPr>
+        </p:nvSpPr>
+        <p:spPr>
+          <a:xfrm>
+            <a:off x="1371600" y="640080"/>
+            <a:ext cx="9448495" cy="868680"/>
+          </a:xfrm>
+        </p:spPr>
+        <p:txBody>
+          <a:bodyPr wrap="square" lIns="54864" rIns="54864" tIns="27432" bIns="27432" anchor="ctr">
+            <a:noAutofit/>
+          </a:bodyPr>
+          <a:lstStyle/>
+          <a:p>
+            <a:pPr algn="ctr">
+              <a:lnSpc>
+                <a:spcPct val="105000"/>
+              </a:lnSpc>
+            </a:pPr>
+            <a:r>
+              <a:rPr sz="3000" b="1" i="0">
+                <a:solidFill>
+                  <a:srgbClr val="26231F"/>
+                </a:solidFill>
+              </a:rPr>
+              <a:t>답례 안내</a:t>
+            </a:r>
+          </a:p>
+        </p:txBody>
+      </p:sp>
+      <p:sp>
+        <p:nvSpPr>
+          <p:cNvPr id="6" name="카드 1"/>
+          <p:cNvSpPr/>
+          <p:nvPr/>
+        </p:nvSpPr>
+        <p:spPr>
+          <a:xfrm>
+            <a:off x="640080" y="1783080"/>
+            <a:ext cx="3484778" cy="4572000"/>
+          </a:xfrm>
+          <a:prstGeom prst="roundRect">
+            <a:avLst>
+              <a:gd name="adj" fmla="val 7000"/>
+            </a:avLst>
+          </a:prstGeom>
+          <a:solidFill>
+            <a:srgbClr val="FFFFFF"/>
+          </a:solidFill>
+          <a:ln w="12700">
+            <a:solidFill>
+              <a:srgbClr val="F2A6B3"/>
+            </a:solidFill>
+          </a:ln>
+        </p:spPr>
+        <p:txBody>
+          <a:bodyPr rtlCol="0" anchor="ctr"/>
+          <a:lstStyle/>
+          <a:p>
+            <a:pPr algn="ctr"/>
+          </a:p>
+        </p:txBody>
+      </p:sp>
+      <p:sp>
+        <p:nvSpPr>
+          <p:cNvPr id="7" name="번호 1"/>
+          <p:cNvSpPr txBox="1"/>
+          <p:nvPr/>
+        </p:nvSpPr>
+        <p:spPr>
+          <a:xfrm>
+            <a:off x="731519" y="1920240"/>
+            <a:ext cx="914400" cy="548640"/>
+          </a:xfrm>
+          <a:prstGeom prst="rect">
+            <a:avLst/>
+          </a:prstGeom>
+          <a:noFill/>
+        </p:spPr>
+        <p:txBody>
+          <a:bodyPr wrap="square" lIns="54864" rIns="54864" tIns="27432" bIns="27432" anchor="ctr">
+            <a:noAutofit/>
+          </a:bodyPr>
+          <a:lstStyle/>
+          <a:p>
+            <a:pPr algn="l">
+              <a:lnSpc>
+                <a:spcPct val="115000"/>
+              </a:lnSpc>
+            </a:pPr>
+            <a:r>
+              <a:rPr sz="2400" b="1" i="0">
+                <a:solidFill>
+                  <a:srgbClr val="ED97A5"/>
+                </a:solidFill>
+              </a:rPr>
+              <a:t>01</a:t>
             </a:r>
           </a:p>
         </p:txBody>
@@ -4384,8 +4545,46 @@
         </p:nvSpPr>
         <p:spPr>
           <a:xfrm>
-            <a:off x="960120" y="3017520"/>
-            <a:ext cx="3088538" cy="3017520"/>
+            <a:off x="777240" y="2560320"/>
+            <a:ext cx="3210458" cy="640080"/>
+          </a:xfrm>
+          <a:prstGeom prst="rect">
+            <a:avLst/>
+          </a:prstGeom>
+          <a:noFill/>
+        </p:spPr>
+        <p:txBody>
+          <a:bodyPr wrap="square" lIns="54864" rIns="54864" tIns="27432" bIns="27432" anchor="ctr">
+            <a:noAutofit/>
+          </a:bodyPr>
+          <a:lstStyle/>
+          <a:p>
+            <a:pPr algn="l">
+              <a:lnSpc>
+                <a:spcPct val="115000"/>
+              </a:lnSpc>
+            </a:pPr>
+            <a:r>
+              <a:rPr sz="1800" b="1" i="0">
+                <a:solidFill>
+                  <a:srgbClr val="49272D"/>
+                </a:solidFill>
+              </a:rPr>
+              <a:t>답례품</a:t>
+            </a:r>
+          </a:p>
+        </p:txBody>
+      </p:sp>
+      <p:sp>
+        <p:nvSpPr>
+          <p:cNvPr id="9" name="TextBox 8"/>
+          <p:cNvSpPr txBox="1"/>
+          <p:nvPr/>
+        </p:nvSpPr>
+        <p:spPr>
+          <a:xfrm>
+            <a:off x="777240" y="3246120"/>
+            <a:ext cx="3210458" cy="2971800"/>
           </a:xfrm>
           <a:prstGeom prst="rect">
             <a:avLst/>
@@ -4406,7 +4605,7 @@
             <a:r>
               <a:rPr sz="1500" b="0" i="0">
                 <a:solidFill>
-                  <a:srgbClr val="2B2B2B"/>
+                  <a:srgbClr val="26231F"/>
                 </a:solidFill>
               </a:rPr>
               <a:t>입력하세요</a:t>
@@ -4416,26 +4615,26 @@
       </p:sp>
       <p:sp>
         <p:nvSpPr>
-          <p:cNvPr id="9" name="카드 2"/>
+          <p:cNvPr id="10" name="카드 2"/>
           <p:cNvSpPr/>
           <p:nvPr/>
         </p:nvSpPr>
         <p:spPr>
           <a:xfrm>
-            <a:off x="4414418" y="1554480"/>
-            <a:ext cx="3362858" cy="4617720"/>
+            <a:off x="4353458" y="1783080"/>
+            <a:ext cx="3484778" cy="4572000"/>
           </a:xfrm>
           <a:prstGeom prst="roundRect">
             <a:avLst>
-              <a:gd name="adj" fmla="val 8000"/>
+              <a:gd name="adj" fmla="val 7000"/>
             </a:avLst>
           </a:prstGeom>
           <a:solidFill>
-            <a:srgbClr val="FCF3F4"/>
+            <a:srgbClr val="FFFFFF"/>
           </a:solidFill>
-          <a:ln w="15875">
+          <a:ln w="12700">
             <a:solidFill>
-              <a:srgbClr val="F7D4DA"/>
+              <a:srgbClr val="F2A6B3"/>
             </a:solidFill>
           </a:ln>
         </p:spPr>
@@ -4449,57 +4648,14 @@
       </p:sp>
       <p:sp>
         <p:nvSpPr>
-          <p:cNvPr id="10" name="번호 2"/>
-          <p:cNvSpPr/>
-          <p:nvPr/>
-        </p:nvSpPr>
-        <p:spPr>
-          <a:xfrm>
-            <a:off x="4597298" y="1737360"/>
-            <a:ext cx="457200" cy="457200"/>
-          </a:xfrm>
-          <a:prstGeom prst="ellipse">
-            <a:avLst/>
-          </a:prstGeom>
-          <a:solidFill>
-            <a:srgbClr val="DF3A55"/>
-          </a:solidFill>
-          <a:ln>
-            <a:noFill/>
-          </a:ln>
-        </p:spPr>
-        <p:txBody>
-          <a:bodyPr rtlCol="0" anchor="ctr" wrap="square" lIns="54864" rIns="54864" tIns="27432" bIns="27432">
-            <a:noAutofit/>
-          </a:bodyPr>
-          <a:lstStyle/>
-          <a:p>
-            <a:pPr algn="ctr">
-              <a:lnSpc>
-                <a:spcPct val="100000"/>
-              </a:lnSpc>
-            </a:pPr>
-            <a:r>
-              <a:rPr sz="1600" b="1" i="0">
-                <a:solidFill>
-                  <a:srgbClr val="FFFFFF"/>
-                </a:solidFill>
-              </a:rPr>
-              <a:t>2</a:t>
-            </a:r>
-          </a:p>
-        </p:txBody>
-      </p:sp>
-      <p:sp>
-        <p:nvSpPr>
-          <p:cNvPr id="11" name="TextBox 10"/>
+          <p:cNvPr id="11" name="번호 2"/>
           <p:cNvSpPr txBox="1"/>
           <p:nvPr/>
         </p:nvSpPr>
         <p:spPr>
           <a:xfrm>
-            <a:off x="4551578" y="2331720"/>
-            <a:ext cx="3088538" cy="640080"/>
+            <a:off x="4444898" y="1920240"/>
+            <a:ext cx="914400" cy="548640"/>
           </a:xfrm>
           <a:prstGeom prst="rect">
             <a:avLst/>
@@ -4518,12 +4674,12 @@
               </a:lnSpc>
             </a:pPr>
             <a:r>
-              <a:rPr sz="1800" b="1" i="0">
-                <a:solidFill>
-                  <a:srgbClr val="721D2B"/>
+              <a:rPr sz="2400" b="1" i="0">
+                <a:solidFill>
+                  <a:srgbClr val="ED97A5"/>
                 </a:solidFill>
               </a:rPr>
-              <a:t>방명록</a:t>
+              <a:t>02</a:t>
             </a:r>
           </a:p>
         </p:txBody>
@@ -4536,8 +4692,46 @@
         </p:nvSpPr>
         <p:spPr>
           <a:xfrm>
-            <a:off x="4551578" y="3017520"/>
-            <a:ext cx="3088538" cy="3017520"/>
+            <a:off x="4490618" y="2560320"/>
+            <a:ext cx="3210458" cy="640080"/>
+          </a:xfrm>
+          <a:prstGeom prst="rect">
+            <a:avLst/>
+          </a:prstGeom>
+          <a:noFill/>
+        </p:spPr>
+        <p:txBody>
+          <a:bodyPr wrap="square" lIns="54864" rIns="54864" tIns="27432" bIns="27432" anchor="ctr">
+            <a:noAutofit/>
+          </a:bodyPr>
+          <a:lstStyle/>
+          <a:p>
+            <a:pPr algn="l">
+              <a:lnSpc>
+                <a:spcPct val="115000"/>
+              </a:lnSpc>
+            </a:pPr>
+            <a:r>
+              <a:rPr sz="1800" b="1" i="0">
+                <a:solidFill>
+                  <a:srgbClr val="49272D"/>
+                </a:solidFill>
+              </a:rPr>
+              <a:t>방명록</a:t>
+            </a:r>
+          </a:p>
+        </p:txBody>
+      </p:sp>
+      <p:sp>
+        <p:nvSpPr>
+          <p:cNvPr id="13" name="TextBox 12"/>
+          <p:cNvSpPr txBox="1"/>
+          <p:nvPr/>
+        </p:nvSpPr>
+        <p:spPr>
+          <a:xfrm>
+            <a:off x="4490618" y="3246120"/>
+            <a:ext cx="3210458" cy="2971800"/>
           </a:xfrm>
           <a:prstGeom prst="rect">
             <a:avLst/>
@@ -4558,7 +4752,7 @@
             <a:r>
               <a:rPr sz="1500" b="0" i="0">
                 <a:solidFill>
-                  <a:srgbClr val="2B2B2B"/>
+                  <a:srgbClr val="26231F"/>
                 </a:solidFill>
               </a:rPr>
               <a:t>입력하세요</a:t>
@@ -4568,26 +4762,26 @@
       </p:sp>
       <p:sp>
         <p:nvSpPr>
-          <p:cNvPr id="13" name="카드 3"/>
+          <p:cNvPr id="14" name="카드 3"/>
           <p:cNvSpPr/>
           <p:nvPr/>
         </p:nvSpPr>
         <p:spPr>
           <a:xfrm>
-            <a:off x="8005876" y="1554480"/>
-            <a:ext cx="3362858" cy="4617720"/>
+            <a:off x="8066836" y="1783080"/>
+            <a:ext cx="3484778" cy="4572000"/>
           </a:xfrm>
           <a:prstGeom prst="roundRect">
             <a:avLst>
-              <a:gd name="adj" fmla="val 8000"/>
+              <a:gd name="adj" fmla="val 7000"/>
             </a:avLst>
           </a:prstGeom>
           <a:solidFill>
-            <a:srgbClr val="FCF3F4"/>
+            <a:srgbClr val="FFFFFF"/>
           </a:solidFill>
-          <a:ln w="15875">
+          <a:ln w="12700">
             <a:solidFill>
-              <a:srgbClr val="F7D4DA"/>
+              <a:srgbClr val="F2A6B3"/>
             </a:solidFill>
           </a:ln>
         </p:spPr>
@@ -4601,57 +4795,14 @@
       </p:sp>
       <p:sp>
         <p:nvSpPr>
-          <p:cNvPr id="14" name="번호 3"/>
-          <p:cNvSpPr/>
-          <p:nvPr/>
-        </p:nvSpPr>
-        <p:spPr>
-          <a:xfrm>
-            <a:off x="8188756" y="1737360"/>
-            <a:ext cx="457200" cy="457200"/>
-          </a:xfrm>
-          <a:prstGeom prst="ellipse">
-            <a:avLst/>
-          </a:prstGeom>
-          <a:solidFill>
-            <a:srgbClr val="DF3A55"/>
-          </a:solidFill>
-          <a:ln>
-            <a:noFill/>
-          </a:ln>
-        </p:spPr>
-        <p:txBody>
-          <a:bodyPr rtlCol="0" anchor="ctr" wrap="square" lIns="54864" rIns="54864" tIns="27432" bIns="27432">
-            <a:noAutofit/>
-          </a:bodyPr>
-          <a:lstStyle/>
-          <a:p>
-            <a:pPr algn="ctr">
-              <a:lnSpc>
-                <a:spcPct val="100000"/>
-              </a:lnSpc>
-            </a:pPr>
-            <a:r>
-              <a:rPr sz="1600" b="1" i="0">
-                <a:solidFill>
-                  <a:srgbClr val="FFFFFF"/>
-                </a:solidFill>
-              </a:rPr>
-              <a:t>3</a:t>
-            </a:r>
-          </a:p>
-        </p:txBody>
-      </p:sp>
-      <p:sp>
-        <p:nvSpPr>
-          <p:cNvPr id="15" name="TextBox 14"/>
+          <p:cNvPr id="15" name="번호 3"/>
           <p:cNvSpPr txBox="1"/>
           <p:nvPr/>
         </p:nvSpPr>
         <p:spPr>
           <a:xfrm>
-            <a:off x="8143036" y="2331720"/>
-            <a:ext cx="3088538" cy="640080"/>
+            <a:off x="8158276" y="1920240"/>
+            <a:ext cx="914400" cy="548640"/>
           </a:xfrm>
           <a:prstGeom prst="rect">
             <a:avLst/>
@@ -4670,12 +4821,12 @@
               </a:lnSpc>
             </a:pPr>
             <a:r>
-              <a:rPr sz="1800" b="1" i="0">
-                <a:solidFill>
-                  <a:srgbClr val="721D2B"/>
+              <a:rPr sz="2400" b="1" i="0">
+                <a:solidFill>
+                  <a:srgbClr val="ED97A5"/>
                 </a:solidFill>
               </a:rPr>
-              <a:t>사진 · 영상</a:t>
+              <a:t>03</a:t>
             </a:r>
           </a:p>
         </p:txBody>
@@ -4688,8 +4839,46 @@
         </p:nvSpPr>
         <p:spPr>
           <a:xfrm>
-            <a:off x="8143036" y="3017520"/>
-            <a:ext cx="3088538" cy="3017520"/>
+            <a:off x="8203996" y="2560320"/>
+            <a:ext cx="3210458" cy="640080"/>
+          </a:xfrm>
+          <a:prstGeom prst="rect">
+            <a:avLst/>
+          </a:prstGeom>
+          <a:noFill/>
+        </p:spPr>
+        <p:txBody>
+          <a:bodyPr wrap="square" lIns="54864" rIns="54864" tIns="27432" bIns="27432" anchor="ctr">
+            <a:noAutofit/>
+          </a:bodyPr>
+          <a:lstStyle/>
+          <a:p>
+            <a:pPr algn="l">
+              <a:lnSpc>
+                <a:spcPct val="115000"/>
+              </a:lnSpc>
+            </a:pPr>
+            <a:r>
+              <a:rPr sz="1800" b="1" i="0">
+                <a:solidFill>
+                  <a:srgbClr val="49272D"/>
+                </a:solidFill>
+              </a:rPr>
+              <a:t>사진 · 영상</a:t>
+            </a:r>
+          </a:p>
+        </p:txBody>
+      </p:sp>
+      <p:sp>
+        <p:nvSpPr>
+          <p:cNvPr id="17" name="TextBox 16"/>
+          <p:cNvSpPr txBox="1"/>
+          <p:nvPr/>
+        </p:nvSpPr>
+        <p:spPr>
+          <a:xfrm>
+            <a:off x="8203996" y="3246120"/>
+            <a:ext cx="3210458" cy="2971800"/>
           </a:xfrm>
           <a:prstGeom prst="rect">
             <a:avLst/>
@@ -4710,7 +4899,7 @@
             <a:r>
               <a:rPr sz="1500" b="0" i="0">
                 <a:solidFill>
-                  <a:srgbClr val="2B2B2B"/>
+                  <a:srgbClr val="26231F"/>
                 </a:solidFill>
               </a:rPr>
               <a:t>입력하세요</a:t>
@@ -4732,7 +4921,7 @@
     <p:bg>
       <p:bgPr>
         <a:solidFill>
-          <a:srgbClr val="FCF3F4"/>
+          <a:srgbClr val="FFFFFF"/>
         </a:solidFill>
         <a:effectLst/>
       </p:bgPr>
@@ -4746,77 +4935,77 @@
       <p:grpSpPr/>
       <p:sp>
         <p:nvSpPr>
-          <p:cNvPr id="3" name="장식"/>
+          <p:cNvPr id="3" name="포인트"/>
           <p:cNvSpPr/>
           <p:nvPr/>
         </p:nvSpPr>
         <p:spPr>
           <a:xfrm>
-            <a:off x="256032" y="256032"/>
-            <a:ext cx="11679631" cy="6345936"/>
+            <a:off x="5958687" y="246888"/>
+            <a:ext cx="274320" cy="274320"/>
+          </a:xfrm>
+          <a:prstGeom prst="mathPlus">
+            <a:avLst/>
+          </a:prstGeom>
+          <a:solidFill>
+            <a:srgbClr val="ED97A5"/>
+          </a:solidFill>
+          <a:ln>
+            <a:noFill/>
+          </a:ln>
+        </p:spPr>
+        <p:txBody>
+          <a:bodyPr rtlCol="0" anchor="ctr"/>
+          <a:lstStyle/>
+          <a:p>
+            <a:pPr algn="ctr"/>
+          </a:p>
+        </p:txBody>
+      </p:sp>
+      <p:sp>
+        <p:nvSpPr>
+          <p:cNvPr id="4" name="장식"/>
+          <p:cNvSpPr/>
+          <p:nvPr/>
+        </p:nvSpPr>
+        <p:spPr>
+          <a:xfrm>
+            <a:off x="5684367" y="1572768"/>
+            <a:ext cx="822960" cy="22860"/>
+          </a:xfrm>
+          <a:prstGeom prst="rect">
+            <a:avLst/>
+          </a:prstGeom>
+          <a:solidFill>
+            <a:srgbClr val="ED97A5"/>
+          </a:solidFill>
+          <a:ln>
+            <a:noFill/>
+          </a:ln>
+        </p:spPr>
+        <p:txBody>
+          <a:bodyPr rtlCol="0" anchor="ctr"/>
+          <a:lstStyle/>
+          <a:p>
+            <a:pPr algn="ctr"/>
+          </a:p>
+        </p:txBody>
+      </p:sp>
+      <p:sp>
+        <p:nvSpPr>
+          <p:cNvPr id="5" name="상단 라벨"/>
+          <p:cNvSpPr txBox="1"/>
+          <p:nvPr/>
+        </p:nvSpPr>
+        <p:spPr>
+          <a:xfrm>
+            <a:off x="640080" y="182880"/>
+            <a:ext cx="3657600" cy="274320"/>
           </a:xfrm>
           <a:prstGeom prst="rect">
             <a:avLst/>
           </a:prstGeom>
           <a:noFill/>
-          <a:ln w="28575">
-            <a:solidFill>
-              <a:srgbClr val="DF3A55"/>
-            </a:solidFill>
-          </a:ln>
-        </p:spPr>
-        <p:txBody>
-          <a:bodyPr rtlCol="0" anchor="ctr"/>
-          <a:lstStyle/>
-          <a:p>
-            <a:pPr algn="ctr"/>
-          </a:p>
-        </p:txBody>
-      </p:sp>
-      <p:sp>
-        <p:nvSpPr>
-          <p:cNvPr id="4" name="장식"/>
-          <p:cNvSpPr/>
-          <p:nvPr/>
-        </p:nvSpPr>
-        <p:spPr>
-          <a:xfrm>
-            <a:off x="384048" y="384048"/>
-            <a:ext cx="11423599" cy="6089904"/>
-          </a:xfrm>
-          <a:prstGeom prst="rect">
-            <a:avLst/>
-          </a:prstGeom>
-          <a:noFill/>
-          <a:ln w="9525">
-            <a:solidFill>
-              <a:srgbClr val="F7D4DA"/>
-            </a:solidFill>
-          </a:ln>
-        </p:spPr>
-        <p:txBody>
-          <a:bodyPr rtlCol="0" anchor="ctr"/>
-          <a:lstStyle/>
-          <a:p>
-            <a:pPr algn="ctr"/>
-          </a:p>
-        </p:txBody>
-      </p:sp>
-      <p:sp>
-        <p:nvSpPr>
-          <p:cNvPr id="2" name="Title 1"/>
-          <p:cNvSpPr>
-            <a:spLocks noGrp="1"/>
-          </p:cNvSpPr>
-          <p:nvPr>
-            <p:ph type="title"/>
-          </p:nvPr>
-        </p:nvSpPr>
-        <p:spPr>
-          <a:xfrm>
-            <a:off x="822960" y="548640"/>
-            <a:ext cx="9265615" cy="822960"/>
-          </a:xfrm>
         </p:spPr>
         <p:txBody>
           <a:bodyPr wrap="square" lIns="54864" rIns="54864" tIns="27432" bIns="27432" anchor="ctr">
@@ -4825,6 +5014,44 @@
           <a:lstStyle/>
           <a:p>
             <a:pPr algn="l">
+              <a:lnSpc>
+                <a:spcPct val="115000"/>
+              </a:lnSpc>
+            </a:pPr>
+            <a:r>
+              <a:rPr sz="800" b="1" i="0" spc="250">
+                <a:solidFill>
+                  <a:srgbClr val="8E8780"/>
+                </a:solidFill>
+              </a:rPr>
+              <a:t>WEDDING</a:t>
+            </a:r>
+          </a:p>
+        </p:txBody>
+      </p:sp>
+      <p:sp>
+        <p:nvSpPr>
+          <p:cNvPr id="2" name="Title 1"/>
+          <p:cNvSpPr>
+            <a:spLocks noGrp="1"/>
+          </p:cNvSpPr>
+          <p:nvPr>
+            <p:ph type="title"/>
+          </p:nvPr>
+        </p:nvSpPr>
+        <p:spPr>
+          <a:xfrm>
+            <a:off x="1371600" y="640080"/>
+            <a:ext cx="9448495" cy="868680"/>
+          </a:xfrm>
+        </p:spPr>
+        <p:txBody>
+          <a:bodyPr wrap="square" lIns="54864" rIns="54864" tIns="27432" bIns="27432" anchor="ctr">
+            <a:noAutofit/>
+          </a:bodyPr>
+          <a:lstStyle/>
+          <a:p>
+            <a:pPr algn="ctr">
               <a:lnSpc>
                 <a:spcPct val="105000"/>
               </a:lnSpc>
@@ -4832,7 +5059,7 @@
             <a:r>
               <a:rPr sz="3000" b="1" i="0">
                 <a:solidFill>
-                  <a:srgbClr val="721D2B"/>
+                  <a:srgbClr val="26231F"/>
                 </a:solidFill>
               </a:rPr>
               <a:t>웨딩 사진</a:t>
@@ -4842,14 +5069,14 @@
       </p:sp>
       <p:sp>
         <p:nvSpPr>
-          <p:cNvPr id="5" name="사진 자리"/>
+          <p:cNvPr id="6" name="사진 자리"/>
           <p:cNvSpPr/>
           <p:nvPr/>
         </p:nvSpPr>
         <p:spPr>
           <a:xfrm>
-            <a:off x="822960" y="1554480"/>
-            <a:ext cx="3393338" cy="2217420"/>
+            <a:off x="640080" y="1783080"/>
+            <a:ext cx="3515258" cy="2194560"/>
           </a:xfrm>
           <a:prstGeom prst="roundRect">
             <a:avLst>
@@ -4857,12 +5084,10 @@
             </a:avLst>
           </a:prstGeom>
           <a:solidFill>
-            <a:srgbClr val="F7D4DA"/>
+            <a:srgbClr val="FAD1D8"/>
           </a:solidFill>
           <a:ln w="19050">
-            <a:solidFill>
-              <a:srgbClr val="DF3A55"/>
-            </a:solidFill>
+            <a:noFill/>
             <a:prstDash val="dash"/>
           </a:ln>
         </p:spPr>
@@ -4880,7 +5105,7 @@
             <a:r>
               <a:rPr sz="1200" b="0" i="0">
                 <a:solidFill>
-                  <a:srgbClr val="721D2B"/>
+                  <a:srgbClr val="8E8780"/>
                 </a:solidFill>
               </a:rPr>
               <a:t>사진 1</a:t>
@@ -4890,14 +5115,14 @@
       </p:sp>
       <p:sp>
         <p:nvSpPr>
-          <p:cNvPr id="6" name="사진 자리"/>
+          <p:cNvPr id="7" name="사진 자리"/>
           <p:cNvSpPr/>
           <p:nvPr/>
         </p:nvSpPr>
         <p:spPr>
           <a:xfrm>
-            <a:off x="4399178" y="1554480"/>
-            <a:ext cx="3393338" cy="2217420"/>
+            <a:off x="4338218" y="1783080"/>
+            <a:ext cx="3515258" cy="2194560"/>
           </a:xfrm>
           <a:prstGeom prst="roundRect">
             <a:avLst>
@@ -4905,12 +5130,10 @@
             </a:avLst>
           </a:prstGeom>
           <a:solidFill>
-            <a:srgbClr val="F7D4DA"/>
+            <a:srgbClr val="FAD1D8"/>
           </a:solidFill>
           <a:ln w="19050">
-            <a:solidFill>
-              <a:srgbClr val="DF3A55"/>
-            </a:solidFill>
+            <a:noFill/>
             <a:prstDash val="dash"/>
           </a:ln>
         </p:spPr>
@@ -4928,7 +5151,7 @@
             <a:r>
               <a:rPr sz="1200" b="0" i="0">
                 <a:solidFill>
-                  <a:srgbClr val="721D2B"/>
+                  <a:srgbClr val="8E8780"/>
                 </a:solidFill>
               </a:rPr>
               <a:t>사진 2</a:t>
@@ -4938,14 +5161,14 @@
       </p:sp>
       <p:sp>
         <p:nvSpPr>
-          <p:cNvPr id="7" name="사진 자리"/>
+          <p:cNvPr id="8" name="사진 자리"/>
           <p:cNvSpPr/>
           <p:nvPr/>
         </p:nvSpPr>
         <p:spPr>
           <a:xfrm>
-            <a:off x="7975396" y="1554480"/>
-            <a:ext cx="3393338" cy="2217420"/>
+            <a:off x="8036356" y="1783080"/>
+            <a:ext cx="3515258" cy="2194560"/>
           </a:xfrm>
           <a:prstGeom prst="roundRect">
             <a:avLst>
@@ -4953,12 +5176,10 @@
             </a:avLst>
           </a:prstGeom>
           <a:solidFill>
-            <a:srgbClr val="F7D4DA"/>
+            <a:srgbClr val="FAD1D8"/>
           </a:solidFill>
           <a:ln w="19050">
-            <a:solidFill>
-              <a:srgbClr val="DF3A55"/>
-            </a:solidFill>
+            <a:noFill/>
             <a:prstDash val="dash"/>
           </a:ln>
         </p:spPr>
@@ -4976,7 +5197,7 @@
             <a:r>
               <a:rPr sz="1200" b="0" i="0">
                 <a:solidFill>
-                  <a:srgbClr val="721D2B"/>
+                  <a:srgbClr val="8E8780"/>
                 </a:solidFill>
               </a:rPr>
               <a:t>사진 3</a:t>
@@ -4986,14 +5207,14 @@
       </p:sp>
       <p:sp>
         <p:nvSpPr>
-          <p:cNvPr id="8" name="사진 자리"/>
+          <p:cNvPr id="9" name="사진 자리"/>
           <p:cNvSpPr/>
           <p:nvPr/>
         </p:nvSpPr>
         <p:spPr>
           <a:xfrm>
-            <a:off x="822960" y="3954780"/>
-            <a:ext cx="3393338" cy="2217420"/>
+            <a:off x="640080" y="4160520"/>
+            <a:ext cx="3515258" cy="2194560"/>
           </a:xfrm>
           <a:prstGeom prst="roundRect">
             <a:avLst>
@@ -5001,12 +5222,10 @@
             </a:avLst>
           </a:prstGeom>
           <a:solidFill>
-            <a:srgbClr val="F7D4DA"/>
+            <a:srgbClr val="FAD1D8"/>
           </a:solidFill>
           <a:ln w="19050">
-            <a:solidFill>
-              <a:srgbClr val="DF3A55"/>
-            </a:solidFill>
+            <a:noFill/>
             <a:prstDash val="dash"/>
           </a:ln>
         </p:spPr>
@@ -5024,7 +5243,7 @@
             <a:r>
               <a:rPr sz="1200" b="0" i="0">
                 <a:solidFill>
-                  <a:srgbClr val="721D2B"/>
+                  <a:srgbClr val="8E8780"/>
                 </a:solidFill>
               </a:rPr>
               <a:t>사진 4</a:t>
@@ -5034,14 +5253,14 @@
       </p:sp>
       <p:sp>
         <p:nvSpPr>
-          <p:cNvPr id="9" name="사진 자리"/>
+          <p:cNvPr id="10" name="사진 자리"/>
           <p:cNvSpPr/>
           <p:nvPr/>
         </p:nvSpPr>
         <p:spPr>
           <a:xfrm>
-            <a:off x="4399178" y="3954780"/>
-            <a:ext cx="3393338" cy="2217420"/>
+            <a:off x="4338218" y="4160520"/>
+            <a:ext cx="3515258" cy="2194560"/>
           </a:xfrm>
           <a:prstGeom prst="roundRect">
             <a:avLst>
@@ -5049,12 +5268,10 @@
             </a:avLst>
           </a:prstGeom>
           <a:solidFill>
-            <a:srgbClr val="F7D4DA"/>
+            <a:srgbClr val="FAD1D8"/>
           </a:solidFill>
           <a:ln w="19050">
-            <a:solidFill>
-              <a:srgbClr val="DF3A55"/>
-            </a:solidFill>
+            <a:noFill/>
             <a:prstDash val="dash"/>
           </a:ln>
         </p:spPr>
@@ -5072,7 +5289,7 @@
             <a:r>
               <a:rPr sz="1200" b="0" i="0">
                 <a:solidFill>
-                  <a:srgbClr val="721D2B"/>
+                  <a:srgbClr val="8E8780"/>
                 </a:solidFill>
               </a:rPr>
               <a:t>사진 5</a:t>
@@ -5082,14 +5299,14 @@
       </p:sp>
       <p:sp>
         <p:nvSpPr>
-          <p:cNvPr id="10" name="사진 자리"/>
+          <p:cNvPr id="11" name="사진 자리"/>
           <p:cNvSpPr/>
           <p:nvPr/>
         </p:nvSpPr>
         <p:spPr>
           <a:xfrm>
-            <a:off x="7975396" y="3954780"/>
-            <a:ext cx="3393338" cy="2217420"/>
+            <a:off x="8036356" y="4160520"/>
+            <a:ext cx="3515258" cy="2194560"/>
           </a:xfrm>
           <a:prstGeom prst="roundRect">
             <a:avLst>
@@ -5097,12 +5314,10 @@
             </a:avLst>
           </a:prstGeom>
           <a:solidFill>
-            <a:srgbClr val="F7D4DA"/>
+            <a:srgbClr val="FAD1D8"/>
           </a:solidFill>
           <a:ln w="19050">
-            <a:solidFill>
-              <a:srgbClr val="DF3A55"/>
-            </a:solidFill>
+            <a:noFill/>
             <a:prstDash val="dash"/>
           </a:ln>
         </p:spPr>
@@ -5120,7 +5335,7 @@
             <a:r>
               <a:rPr sz="1200" b="0" i="0">
                 <a:solidFill>
-                  <a:srgbClr val="721D2B"/>
+                  <a:srgbClr val="8E8780"/>
                 </a:solidFill>
               </a:rPr>
               <a:t>사진 6</a:t>
@@ -5139,6 +5354,14 @@
 <file path=ppt/slides/slide6.xml><?xml version="1.0" encoding="utf-8"?>
 <p:sld xmlns:a="http://schemas.openxmlformats.org/drawingml/2006/main" xmlns:p="http://schemas.openxmlformats.org/presentationml/2006/main" xmlns:r="http://schemas.openxmlformats.org/officeDocument/2006/relationships">
   <p:cSld>
+    <p:bg>
+      <p:bgPr>
+        <a:solidFill>
+          <a:srgbClr val="FDEAED"/>
+        </a:solidFill>
+        <a:effectLst/>
+      </p:bgPr>
+    </p:bg>
     <p:spTree>
       <p:nvGrpSpPr>
         <p:cNvPr id="1" name=""/>
@@ -5146,30 +5369,116 @@
         <p:nvPr/>
       </p:nvGrpSpPr>
       <p:grpSpPr/>
-      <p:pic>
-        <p:nvPicPr>
-          <p:cNvPr id="3" name="표지 그림" descr="wedding-10.jpg"/>
-          <p:cNvPicPr>
-            <a:picLocks noChangeAspect="1"/>
-          </p:cNvPicPr>
+      <p:sp>
+        <p:nvSpPr>
+          <p:cNvPr id="3" name="사진 자리"/>
+          <p:cNvSpPr/>
           <p:nvPr/>
-        </p:nvPicPr>
-        <p:blipFill>
-          <a:blip r:embed="rId2"/>
-          <a:stretch>
-            <a:fillRect/>
-          </a:stretch>
-        </p:blipFill>
+        </p:nvSpPr>
         <p:spPr>
           <a:xfrm>
             <a:off x="0" y="0"/>
-            <a:ext cx="12191695" cy="6858000"/>
+            <a:ext cx="4389010" cy="6858000"/>
           </a:xfrm>
           <a:prstGeom prst="rect">
             <a:avLst/>
           </a:prstGeom>
-        </p:spPr>
-      </p:pic>
+          <a:solidFill>
+            <a:srgbClr val="F2A6B3"/>
+          </a:solidFill>
+          <a:ln>
+            <a:noFill/>
+          </a:ln>
+        </p:spPr>
+        <p:txBody>
+          <a:bodyPr rtlCol="0" anchor="ctr" wrap="square" lIns="54864" rIns="54864" tIns="27432" bIns="27432">
+            <a:noAutofit/>
+          </a:bodyPr>
+          <a:lstStyle/>
+          <a:p>
+            <a:pPr algn="ctr">
+              <a:lnSpc>
+                <a:spcPct val="100000"/>
+              </a:lnSpc>
+            </a:pPr>
+            <a:r>
+              <a:rPr sz="1400" b="0" i="0">
+                <a:solidFill>
+                  <a:srgbClr val="49272D"/>
+                </a:solidFill>
+              </a:rPr>
+              <a:t>사진을 넣어 주세요</a:t>
+            </a:r>
+          </a:p>
+        </p:txBody>
+      </p:sp>
+      <p:sp>
+        <p:nvSpPr>
+          <p:cNvPr id="4" name="장식"/>
+          <p:cNvSpPr/>
+          <p:nvPr/>
+        </p:nvSpPr>
+        <p:spPr>
+          <a:xfrm>
+            <a:off x="365750" y="365760"/>
+            <a:ext cx="3657508" cy="6126480"/>
+          </a:xfrm>
+          <a:prstGeom prst="rect">
+            <a:avLst/>
+          </a:prstGeom>
+          <a:noFill/>
+          <a:ln w="9525">
+            <a:solidFill>
+              <a:srgbClr val="26231F"/>
+            </a:solidFill>
+          </a:ln>
+        </p:spPr>
+        <p:txBody>
+          <a:bodyPr rtlCol="0" anchor="ctr"/>
+          <a:lstStyle/>
+          <a:p>
+            <a:pPr algn="ctr"/>
+          </a:p>
+        </p:txBody>
+      </p:sp>
+      <p:sp>
+        <p:nvSpPr>
+          <p:cNvPr id="5" name="라벨"/>
+          <p:cNvSpPr txBox="1"/>
+          <p:nvPr/>
+        </p:nvSpPr>
+        <p:spPr>
+          <a:xfrm>
+            <a:off x="6827349" y="2148840"/>
+            <a:ext cx="4632844" cy="274320"/>
+          </a:xfrm>
+          <a:prstGeom prst="rect">
+            <a:avLst/>
+          </a:prstGeom>
+          <a:noFill/>
+        </p:spPr>
+        <p:txBody>
+          <a:bodyPr wrap="square" lIns="54864" rIns="54864" tIns="27432" bIns="27432" anchor="t">
+            <a:noAutofit/>
+          </a:bodyPr>
+          <a:lstStyle/>
+          <a:p>
+            <a:pPr algn="l">
+              <a:lnSpc>
+                <a:spcPct val="115000"/>
+              </a:lnSpc>
+            </a:pPr>
+            <a:r>
+              <a:rPr sz="1000" b="1" i="0" spc="250">
+                <a:solidFill>
+                  <a:srgbClr val="26231F"/>
+                </a:solidFill>
+              </a:rPr>
+              <a:t>WEDDING</a:t>
+            </a:r>
+          </a:p>
+        </p:txBody>
+      </p:sp>
       <p:sp>
         <p:nvSpPr>
           <p:cNvPr id="2" name="Title 1"/>
@@ -5182,8 +5491,8 @@
         </p:nvSpPr>
         <p:spPr>
           <a:xfrm>
-            <a:off x="853418" y="2057400"/>
-            <a:ext cx="6095847" cy="1554480"/>
+            <a:off x="6827349" y="2606040"/>
+            <a:ext cx="4632844" cy="1188720"/>
           </a:xfrm>
         </p:spPr>
         <p:txBody>
@@ -5200,7 +5509,7 @@
             <a:r>
               <a:rPr sz="3400" b="1" i="0">
                 <a:solidFill>
-                  <a:srgbClr val="721D2B"/>
+                  <a:srgbClr val="26231F"/>
                 </a:solidFill>
               </a:rPr>
               <a:t>와 주셔서 고맙습니다</a:t>
@@ -5210,14 +5519,14 @@
       </p:sp>
       <p:sp>
         <p:nvSpPr>
-          <p:cNvPr id="4" name="한 줄 문구"/>
+          <p:cNvPr id="6" name="한 줄 문구"/>
           <p:cNvSpPr txBox="1"/>
           <p:nvPr/>
         </p:nvSpPr>
         <p:spPr>
           <a:xfrm>
-            <a:off x="853418" y="3749039"/>
-            <a:ext cx="6095847" cy="822960"/>
+            <a:off x="6827349" y="3886200"/>
+            <a:ext cx="4632844" cy="822960"/>
           </a:xfrm>
           <a:prstGeom prst="rect">
             <a:avLst/>
@@ -5236,9 +5545,9 @@
               </a:lnSpc>
             </a:pPr>
             <a:r>
-              <a:rPr sz="1700" b="0" i="1">
-                <a:solidFill>
-                  <a:srgbClr val="721D2B"/>
+              <a:rPr sz="1700" b="0" i="0">
+                <a:solidFill>
+                  <a:srgbClr val="26231F"/>
                 </a:solidFill>
               </a:rPr>
               <a:t>잘 살겠습니다</a:t>
@@ -5248,14 +5557,14 @@
       </p:sp>
       <p:sp>
         <p:nvSpPr>
-          <p:cNvPr id="5" name="안내 문구"/>
+          <p:cNvPr id="7" name="안내 문구"/>
           <p:cNvSpPr txBox="1"/>
           <p:nvPr/>
         </p:nvSpPr>
         <p:spPr>
           <a:xfrm>
-            <a:off x="853418" y="4617720"/>
-            <a:ext cx="6095847" cy="914400"/>
+            <a:off x="6827349" y="4754880"/>
+            <a:ext cx="4632844" cy="914400"/>
           </a:xfrm>
           <a:prstGeom prst="rect">
             <a:avLst/>
@@ -5276,7 +5585,7 @@
             <a:r>
               <a:rPr sz="1400" b="0" i="0">
                 <a:solidFill>
-                  <a:srgbClr val="666666"/>
+                  <a:srgbClr val="26231F"/>
                 </a:solidFill>
               </a:rPr>
               <a:t>신랑 이름 ♥ 신부 이름</a:t>
@@ -5303,34 +5612,34 @@
         <a:sysClr val="window" lastClr="FFFFFF"/>
       </a:lt1>
       <a:dk2>
-        <a:srgbClr val="721D2B"/>
+        <a:srgbClr val="49272D"/>
       </a:dk2>
       <a:lt2>
-        <a:srgbClr val="FCF3F4"/>
+        <a:srgbClr val="FDEAED"/>
       </a:lt2>
       <a:accent1>
-        <a:srgbClr val="DF3A55"/>
+        <a:srgbClr val="ED97A5"/>
       </a:accent1>
       <a:accent2>
-        <a:srgbClr val="339941"/>
+        <a:srgbClr val="F3CBBA"/>
       </a:accent2>
       <a:accent3>
-        <a:srgbClr val="721D2B"/>
+        <a:srgbClr val="49272D"/>
       </a:accent3>
       <a:accent4>
-        <a:srgbClr val="F7D4DA"/>
+        <a:srgbClr val="FAD1D8"/>
       </a:accent4>
       <a:accent5>
-        <a:srgbClr val="896A4B"/>
+        <a:srgbClr val="F0B1B0"/>
       </a:accent5>
       <a:accent6>
-        <a:srgbClr val="AA7780"/>
+        <a:srgbClr val="927D81"/>
       </a:accent6>
       <a:hlink>
-        <a:srgbClr val="DF3A55"/>
+        <a:srgbClr val="ED97A5"/>
       </a:hlink>
       <a:folHlink>
-        <a:srgbClr val="721D2B"/>
+        <a:srgbClr val="49272D"/>
       </a:folHlink>
     </a:clrScheme>
     <a:fontScheme name="Office">
